--- a/本体建模平台-产品介绍-优化版.pptx
+++ b/本体建模平台-产品介绍-优化版.pptx
@@ -9286,7 +9286,9 @@
             <a:r>
               <a:rPr lang="en-US" sz="1000" b="1" dirty="0">
                 <a:solidFill>
-                  <a:srgbClr val="FFFFFF"/>
+                  <a:schemeClr val="bg1">
+                    <a:lumMod val="85000"/>
+                  </a:schemeClr>
                 </a:solidFill>
                 <a:latin typeface="Arial" pitchFamily="34" charset="0"/>
                 <a:ea typeface="Arial" pitchFamily="34" charset="-122"/>
@@ -9294,7 +9296,13 @@
               </a:rPr>
               <a:t>软约束</a:t>
             </a:r>
-            <a:endParaRPr lang="en-US" sz="1000" dirty="0"/>
+            <a:endParaRPr lang="en-US" sz="1000" dirty="0">
+              <a:solidFill>
+                <a:schemeClr val="bg1">
+                  <a:lumMod val="85000"/>
+                </a:schemeClr>
+              </a:solidFill>
+            </a:endParaRPr>
           </a:p>
         </p:txBody>
       </p:sp>
@@ -9530,7 +9538,9 @@
             <a:r>
               <a:rPr lang="en-US" sz="1000" b="1" dirty="0">
                 <a:solidFill>
-                  <a:srgbClr val="FFFFFF"/>
+                  <a:schemeClr val="bg1">
+                    <a:lumMod val="85000"/>
+                  </a:schemeClr>
                 </a:solidFill>
                 <a:latin typeface="Arial" pitchFamily="34" charset="0"/>
                 <a:ea typeface="Arial" pitchFamily="34" charset="-122"/>
@@ -9538,7 +9548,13 @@
               </a:rPr>
               <a:t>硬约束</a:t>
             </a:r>
-            <a:endParaRPr lang="en-US" sz="1000" dirty="0"/>
+            <a:endParaRPr lang="en-US" sz="1000" dirty="0">
+              <a:solidFill>
+                <a:schemeClr val="bg1">
+                  <a:lumMod val="85000"/>
+                </a:schemeClr>
+              </a:solidFill>
+            </a:endParaRPr>
           </a:p>
         </p:txBody>
       </p:sp>
@@ -9774,7 +9790,9 @@
             <a:r>
               <a:rPr lang="en-US" sz="1000" b="1" dirty="0">
                 <a:solidFill>
-                  <a:srgbClr val="FFFFFF"/>
+                  <a:schemeClr val="bg1">
+                    <a:lumMod val="85000"/>
+                  </a:schemeClr>
                 </a:solidFill>
                 <a:latin typeface="Arial" pitchFamily="34" charset="0"/>
                 <a:ea typeface="Arial" pitchFamily="34" charset="-122"/>
@@ -9782,7 +9800,13 @@
               </a:rPr>
               <a:t>校验层</a:t>
             </a:r>
-            <a:endParaRPr lang="en-US" sz="1000" dirty="0"/>
+            <a:endParaRPr lang="en-US" sz="1000" dirty="0">
+              <a:solidFill>
+                <a:schemeClr val="bg1">
+                  <a:lumMod val="85000"/>
+                </a:schemeClr>
+              </a:solidFill>
+            </a:endParaRPr>
           </a:p>
         </p:txBody>
       </p:sp>
@@ -9843,7 +9867,7 @@
           <a:bodyPr/>
           <a:lstStyle/>
           <a:p>
-            <a:endParaRPr lang="zh-CN" altLang="en-US"/>
+            <a:endParaRPr lang="zh-CN" altLang="en-US" dirty="0"/>
           </a:p>
         </p:txBody>
       </p:sp>
@@ -10317,8 +10341,13 @@
             </a:r>
             <a:r>
               <a:rPr lang="en-US" altLang="zh-CN" sz="1000" b="1" dirty="0"/>
-              <a:t>Cypher/SPARQL/SQL</a:t>
-            </a:r>
+              <a:t>SQL</a:t>
+            </a:r>
+            <a:r>
+              <a:rPr lang="zh-CN" altLang="en-US" sz="1000" b="1" dirty="0"/>
+              <a:t>或精确字段</a:t>
+            </a:r>
+            <a:endParaRPr lang="en-US" altLang="zh-CN" sz="1000" b="1" dirty="0"/>
           </a:p>
           <a:p>
             <a:pPr marL="182563" indent="-182563">
@@ -10333,7 +10362,7 @@
             </a:pPr>
             <a:r>
               <a:rPr lang="zh-CN" altLang="en-US" sz="1000" b="1" dirty="0"/>
-              <a:t>安全隔离：查询权限、敏感字段脱敏在 </a:t>
+              <a:t>安全隔离：查询权限、敏感字段脱敏，在 </a:t>
             </a:r>
             <a:r>
               <a:rPr lang="en-US" altLang="zh-CN" sz="1000" b="1" dirty="0"/>
@@ -15307,40 +15336,26 @@
           </a:bodyPr>
           <a:lstStyle/>
           <a:p>
-            <a:pPr marL="0" marR="0" lvl="0" indent="0" algn="ctr" defTabSz="914400" eaLnBrk="1" fontAlgn="auto" latinLnBrk="0" hangingPunct="1">
-              <a:lnSpc>
-                <a:spcPct val="100000"/>
-              </a:lnSpc>
-              <a:spcBef>
-                <a:spcPts val="0"/>
-              </a:spcBef>
-              <a:spcAft>
-                <a:spcPts val="0"/>
-              </a:spcAft>
-              <a:buClrTx/>
-              <a:buSzTx/>
-              <a:buFontTx/>
-              <a:buNone/>
-              <a:tabLst/>
+            <a:pPr lvl="0" algn="ctr">
               <a:defRPr/>
             </a:pPr>
             <a:r>
-              <a:rPr kumimoji="0" lang="en-US" altLang="zh-CN" sz="1100" b="0" i="0" u="none" strike="noStrike" kern="0" cap="none" spc="0" normalizeH="0" baseline="0" noProof="0" dirty="0">
-                <a:ln>
-                  <a:noFill/>
-                </a:ln>
+              <a:rPr lang="zh-CN" altLang="en-US" sz="1100" kern="0" dirty="0">
                 <a:solidFill>
                   <a:srgbClr val="000000"/>
                 </a:solidFill>
-                <a:effectLst/>
-                <a:uLnTx/>
-                <a:uFillTx/>
                 <a:latin typeface="华文楷体"/>
                 <a:ea typeface="华文楷体"/>
-                <a:cs typeface="+mn-cs"/>
-              </a:rPr>
-              <a:t>Rule</a:t>
-            </a:r>
+              </a:rPr>
+              <a:t>权限检查</a:t>
+            </a:r>
+            <a:endParaRPr lang="en-US" altLang="zh-CN" sz="1100" kern="0" dirty="0">
+              <a:solidFill>
+                <a:srgbClr val="000000"/>
+              </a:solidFill>
+              <a:latin typeface="华文楷体"/>
+              <a:ea typeface="华文楷体"/>
+            </a:endParaRPr>
           </a:p>
         </p:txBody>
       </p:sp>
@@ -15709,15 +15724,7 @@
               </a:r>
               <a:r>
                 <a:rPr lang="zh-CN" altLang="en-US" sz="900" dirty="0"/>
-                <a:t>控制  </a:t>
-              </a:r>
-              <a:r>
-                <a:rPr lang="en-US" altLang="zh-CN" sz="900" dirty="0"/>
-                <a:t>&lt;- </a:t>
-              </a:r>
-              <a:r>
-                <a:rPr lang="zh-CN" altLang="en-US" sz="900" dirty="0"/>
-                <a:t>软性引导，让 </a:t>
+                <a:t>控制  ：软性引导，让 </a:t>
               </a:r>
               <a:r>
                 <a:rPr lang="en-US" altLang="zh-CN" sz="900" dirty="0"/>
@@ -15745,11 +15752,11 @@
               </a:r>
               <a:r>
                 <a:rPr lang="zh-CN" altLang="en-US" sz="900" dirty="0"/>
-                <a:t>强制  </a:t>
+                <a:t>强制  ：</a:t>
               </a:r>
               <a:r>
                 <a:rPr lang="en-US" altLang="zh-CN" sz="900" dirty="0"/>
-                <a:t>&lt;- </a:t>
+                <a:t> </a:t>
               </a:r>
               <a:r>
                 <a:rPr lang="en-US" altLang="zh-CN" sz="900" dirty="0" err="1"/>
@@ -15773,11 +15780,11 @@
             <a:p>
               <a:r>
                 <a:rPr lang="zh-CN" altLang="en-US" sz="900" dirty="0"/>
-                <a:t>第三层：架构硬控制  </a:t>
+                <a:t>第三层：架构控制  ：</a:t>
               </a:r>
               <a:r>
                 <a:rPr lang="en-US" altLang="zh-CN" sz="900" dirty="0"/>
-                <a:t>&lt;- </a:t>
+                <a:t> </a:t>
               </a:r>
               <a:r>
                 <a:rPr lang="zh-CN" altLang="en-US" sz="900" dirty="0"/>
@@ -15801,11 +15808,11 @@
             <a:p>
               <a:r>
                 <a:rPr lang="zh-CN" altLang="en-US" sz="900" dirty="0"/>
-                <a:t>第四层：校验兜底  </a:t>
+                <a:t>第四层：校验兜底  ：</a:t>
               </a:r>
               <a:r>
                 <a:rPr lang="en-US" altLang="zh-CN" sz="900" dirty="0"/>
-                <a:t>&lt;- </a:t>
+                <a:t> </a:t>
               </a:r>
               <a:r>
                 <a:rPr lang="zh-CN" altLang="en-US" sz="900" dirty="0"/>
@@ -17832,40 +17839,26 @@
           </a:bodyPr>
           <a:lstStyle/>
           <a:p>
-            <a:pPr marL="0" marR="0" lvl="0" indent="0" algn="ctr" defTabSz="914400" eaLnBrk="1" fontAlgn="auto" latinLnBrk="0" hangingPunct="1">
-              <a:lnSpc>
-                <a:spcPct val="100000"/>
-              </a:lnSpc>
-              <a:spcBef>
-                <a:spcPts val="0"/>
-              </a:spcBef>
-              <a:spcAft>
-                <a:spcPts val="0"/>
-              </a:spcAft>
-              <a:buClrTx/>
-              <a:buSzTx/>
-              <a:buFontTx/>
-              <a:buNone/>
-              <a:tabLst/>
+            <a:pPr lvl="0" algn="ctr">
               <a:defRPr/>
             </a:pPr>
             <a:r>
-              <a:rPr kumimoji="0" lang="en-US" altLang="zh-CN" sz="1100" b="0" i="0" u="none" strike="noStrike" kern="0" cap="none" spc="0" normalizeH="0" baseline="0" noProof="0" dirty="0">
-                <a:ln>
-                  <a:noFill/>
-                </a:ln>
+              <a:rPr lang="zh-CN" altLang="en-US" sz="1100" kern="0" dirty="0">
                 <a:solidFill>
                   <a:srgbClr val="000000"/>
                 </a:solidFill>
-                <a:effectLst/>
-                <a:uLnTx/>
-                <a:uFillTx/>
                 <a:latin typeface="华文楷体"/>
                 <a:ea typeface="华文楷体"/>
-                <a:cs typeface="+mn-cs"/>
-              </a:rPr>
-              <a:t>Rule</a:t>
-            </a:r>
+              </a:rPr>
+              <a:t>权限检查</a:t>
+            </a:r>
+            <a:endParaRPr lang="en-US" altLang="zh-CN" sz="1100" kern="0" dirty="0">
+              <a:solidFill>
+                <a:srgbClr val="000000"/>
+              </a:solidFill>
+              <a:latin typeface="华文楷体"/>
+              <a:ea typeface="华文楷体"/>
+            </a:endParaRPr>
           </a:p>
         </p:txBody>
       </p:sp>
@@ -19983,40 +19976,26 @@
           </a:bodyPr>
           <a:lstStyle/>
           <a:p>
-            <a:pPr marL="0" marR="0" lvl="0" indent="0" algn="ctr" defTabSz="914400" eaLnBrk="1" fontAlgn="auto" latinLnBrk="0" hangingPunct="1">
-              <a:lnSpc>
-                <a:spcPct val="100000"/>
-              </a:lnSpc>
-              <a:spcBef>
-                <a:spcPts val="0"/>
-              </a:spcBef>
-              <a:spcAft>
-                <a:spcPts val="0"/>
-              </a:spcAft>
-              <a:buClrTx/>
-              <a:buSzTx/>
-              <a:buFontTx/>
-              <a:buNone/>
-              <a:tabLst/>
+            <a:pPr lvl="0" algn="ctr">
               <a:defRPr/>
             </a:pPr>
             <a:r>
-              <a:rPr kumimoji="0" lang="en-US" altLang="zh-CN" sz="1100" b="0" i="0" u="none" strike="noStrike" kern="0" cap="none" spc="0" normalizeH="0" baseline="0" noProof="0" dirty="0">
-                <a:ln>
-                  <a:noFill/>
-                </a:ln>
+              <a:rPr lang="zh-CN" altLang="en-US" sz="1100" kern="0" dirty="0">
                 <a:solidFill>
                   <a:srgbClr val="000000"/>
                 </a:solidFill>
-                <a:effectLst/>
-                <a:uLnTx/>
-                <a:uFillTx/>
                 <a:latin typeface="华文楷体"/>
                 <a:ea typeface="华文楷体"/>
-                <a:cs typeface="+mn-cs"/>
-              </a:rPr>
-              <a:t>Rule</a:t>
-            </a:r>
+              </a:rPr>
+              <a:t>权限检查</a:t>
+            </a:r>
+            <a:endParaRPr lang="en-US" altLang="zh-CN" sz="1100" kern="0" dirty="0">
+              <a:solidFill>
+                <a:srgbClr val="000000"/>
+              </a:solidFill>
+              <a:latin typeface="华文楷体"/>
+              <a:ea typeface="华文楷体"/>
+            </a:endParaRPr>
           </a:p>
         </p:txBody>
       </p:sp>
@@ -22077,7 +22056,7 @@
               <a:defRPr/>
             </a:pPr>
             <a:r>
-              <a:rPr kumimoji="0" lang="en-US" altLang="zh-CN" sz="1100" b="0" i="0" u="none" strike="noStrike" kern="0" cap="none" spc="0" normalizeH="0" baseline="0" noProof="0" dirty="0">
+              <a:rPr kumimoji="0" lang="zh-CN" altLang="en-US" sz="1100" b="0" i="0" u="none" strike="noStrike" kern="0" cap="none" spc="0" normalizeH="0" baseline="0" noProof="0" dirty="0">
                 <a:ln>
                   <a:noFill/>
                 </a:ln>
@@ -22091,8 +22070,22 @@
                 <a:ea typeface="华文楷体"/>
                 <a:cs typeface="+mn-cs"/>
               </a:rPr>
-              <a:t>Rule</a:t>
-            </a:r>
+              <a:t>权限检查</a:t>
+            </a:r>
+            <a:endParaRPr kumimoji="0" lang="en-US" altLang="zh-CN" sz="1100" b="0" i="0" u="none" strike="noStrike" kern="0" cap="none" spc="0" normalizeH="0" baseline="0" noProof="0" dirty="0">
+              <a:ln>
+                <a:noFill/>
+              </a:ln>
+              <a:solidFill>
+                <a:srgbClr val="000000"/>
+              </a:solidFill>
+              <a:effectLst/>
+              <a:uLnTx/>
+              <a:uFillTx/>
+              <a:latin typeface="华文楷体"/>
+              <a:ea typeface="华文楷体"/>
+              <a:cs typeface="+mn-cs"/>
+            </a:endParaRPr>
           </a:p>
         </p:txBody>
       </p:sp>
@@ -24938,40 +24931,26 @@
           </a:bodyPr>
           <a:lstStyle/>
           <a:p>
-            <a:pPr marL="0" marR="0" lvl="0" indent="0" algn="ctr" defTabSz="914400" eaLnBrk="1" fontAlgn="auto" latinLnBrk="0" hangingPunct="1">
-              <a:lnSpc>
-                <a:spcPct val="100000"/>
-              </a:lnSpc>
-              <a:spcBef>
-                <a:spcPts val="0"/>
-              </a:spcBef>
-              <a:spcAft>
-                <a:spcPts val="0"/>
-              </a:spcAft>
-              <a:buClrTx/>
-              <a:buSzTx/>
-              <a:buFontTx/>
-              <a:buNone/>
-              <a:tabLst/>
+            <a:pPr lvl="0" algn="ctr">
               <a:defRPr/>
             </a:pPr>
             <a:r>
-              <a:rPr kumimoji="0" lang="en-US" altLang="zh-CN" sz="1100" b="0" i="0" u="none" strike="noStrike" kern="0" cap="none" spc="0" normalizeH="0" baseline="0" noProof="0" dirty="0">
-                <a:ln>
-                  <a:noFill/>
-                </a:ln>
+              <a:rPr lang="zh-CN" altLang="en-US" sz="1100" kern="0" dirty="0">
                 <a:solidFill>
                   <a:srgbClr val="000000"/>
                 </a:solidFill>
-                <a:effectLst/>
-                <a:uLnTx/>
-                <a:uFillTx/>
                 <a:latin typeface="华文楷体"/>
                 <a:ea typeface="华文楷体"/>
-                <a:cs typeface="+mn-cs"/>
-              </a:rPr>
-              <a:t>Rule</a:t>
-            </a:r>
+              </a:rPr>
+              <a:t>权限检查</a:t>
+            </a:r>
+            <a:endParaRPr lang="en-US" altLang="zh-CN" sz="1100" kern="0" dirty="0">
+              <a:solidFill>
+                <a:srgbClr val="000000"/>
+              </a:solidFill>
+              <a:latin typeface="华文楷体"/>
+              <a:ea typeface="华文楷体"/>
+            </a:endParaRPr>
           </a:p>
         </p:txBody>
       </p:sp>
@@ -32033,7 +32012,7 @@
                 <a:ea typeface="等线" panose="02010600030101010101" pitchFamily="2" charset="-122"/>
                 <a:cs typeface="+mn-cs"/>
               </a:rPr>
-              <a:t>      |--</a:t>
+              <a:t>|--</a:t>
             </a:r>
             <a:r>
               <a:rPr kumimoji="0" lang="zh-CN" altLang="en-US" sz="900" b="0" i="0" u="none" strike="noStrike" kern="1200" cap="none" spc="0" normalizeH="0" baseline="0" noProof="0" dirty="0">
@@ -32100,7 +32079,7 @@
                 <a:ea typeface="等线" panose="02010600030101010101" pitchFamily="2" charset="-122"/>
                 <a:cs typeface="+mn-cs"/>
               </a:rPr>
-              <a:t>      |--</a:t>
+              <a:t>|--</a:t>
             </a:r>
             <a:r>
               <a:rPr kumimoji="0" lang="zh-CN" altLang="en-US" sz="900" b="0" i="0" u="none" strike="noStrike" kern="1200" cap="none" spc="0" normalizeH="0" baseline="0" noProof="0" dirty="0">
@@ -32167,7 +32146,7 @@
                 <a:ea typeface="等线" panose="02010600030101010101" pitchFamily="2" charset="-122"/>
                 <a:cs typeface="+mn-cs"/>
               </a:rPr>
-              <a:t>      |--</a:t>
+              <a:t>|--</a:t>
             </a:r>
             <a:r>
               <a:rPr kumimoji="0" lang="zh-CN" altLang="en-US" sz="900" b="0" i="0" u="none" strike="noStrike" kern="1200" cap="none" spc="0" normalizeH="0" baseline="0" noProof="0" dirty="0">
@@ -32234,7 +32213,7 @@
                 <a:ea typeface="等线" panose="02010600030101010101" pitchFamily="2" charset="-122"/>
                 <a:cs typeface="+mn-cs"/>
               </a:rPr>
-              <a:t>      |--</a:t>
+              <a:t>|--</a:t>
             </a:r>
             <a:r>
               <a:rPr kumimoji="0" lang="zh-CN" altLang="en-US" sz="900" b="0" i="0" u="none" strike="noStrike" kern="1200" cap="none" spc="0" normalizeH="0" baseline="0" noProof="0" dirty="0">
@@ -32351,7 +32330,7 @@
                 <a:ea typeface="等线" panose="02010600030101010101" pitchFamily="2" charset="-122"/>
                 <a:cs typeface="+mn-cs"/>
               </a:rPr>
-              <a:t>      |--</a:t>
+              <a:t>|--</a:t>
             </a:r>
             <a:r>
               <a:rPr kumimoji="0" lang="zh-CN" altLang="en-US" sz="900" b="0" i="0" u="none" strike="noStrike" kern="1200" cap="none" spc="0" normalizeH="0" baseline="0" noProof="0" dirty="0">
@@ -32418,7 +32397,7 @@
                 <a:ea typeface="等线" panose="02010600030101010101" pitchFamily="2" charset="-122"/>
                 <a:cs typeface="+mn-cs"/>
               </a:rPr>
-              <a:t>      |--</a:t>
+              <a:t>|--</a:t>
             </a:r>
             <a:r>
               <a:rPr kumimoji="0" lang="zh-CN" altLang="en-US" sz="900" b="0" i="0" u="none" strike="noStrike" kern="1200" cap="none" spc="0" normalizeH="0" baseline="0" noProof="0" dirty="0">
@@ -32521,23 +32500,6 @@
               <a:defRPr/>
             </a:pPr>
             <a:r>
-              <a:rPr kumimoji="0" lang="zh-CN" altLang="en-US" sz="900" b="0" i="0" u="none" strike="noStrike" kern="1200" cap="none" spc="0" normalizeH="0" baseline="0" noProof="0" dirty="0">
-                <a:ln>
-                  <a:noFill/>
-                </a:ln>
-                <a:solidFill>
-                  <a:prstClr val="black"/>
-                </a:solidFill>
-                <a:effectLst/>
-                <a:uLnTx/>
-                <a:uFillTx/>
-                <a:latin typeface="Calibri" panose="020F0502020204030204"/>
-                <a:ea typeface="等线" panose="02010600030101010101" pitchFamily="2" charset="-122"/>
-                <a:cs typeface="+mn-cs"/>
-              </a:rPr>
-              <a:t>      </a:t>
-            </a:r>
-            <a:r>
               <a:rPr kumimoji="0" lang="en-US" altLang="zh-CN" sz="900" b="0" i="0" u="none" strike="noStrike" kern="1200" cap="none" spc="0" normalizeH="0" baseline="0" noProof="0" dirty="0">
                 <a:ln>
                   <a:noFill/>
@@ -32653,7 +32615,7 @@
                 <a:ea typeface="等线" panose="02010600030101010101" pitchFamily="2" charset="-122"/>
                 <a:cs typeface="+mn-cs"/>
               </a:rPr>
-              <a:t>      |--</a:t>
+              <a:t>|--</a:t>
             </a:r>
             <a:r>
               <a:rPr kumimoji="0" lang="zh-CN" altLang="en-US" sz="900" b="0" i="0" u="none" strike="noStrike" kern="1200" cap="none" spc="0" normalizeH="0" baseline="0" noProof="0" dirty="0">
@@ -32720,7 +32682,7 @@
                 <a:ea typeface="等线" panose="02010600030101010101" pitchFamily="2" charset="-122"/>
                 <a:cs typeface="+mn-cs"/>
               </a:rPr>
-              <a:t>            |--</a:t>
+              <a:t>     |--</a:t>
             </a:r>
             <a:r>
               <a:rPr kumimoji="0" lang="zh-CN" altLang="en-US" sz="900" b="0" i="0" u="none" strike="noStrike" kern="1200" cap="none" spc="0" normalizeH="0" baseline="0" noProof="0" dirty="0">
@@ -32787,7 +32749,7 @@
                 <a:ea typeface="等线" panose="02010600030101010101" pitchFamily="2" charset="-122"/>
                 <a:cs typeface="+mn-cs"/>
               </a:rPr>
-              <a:t>            |--</a:t>
+              <a:t>     |--</a:t>
             </a:r>
             <a:r>
               <a:rPr kumimoji="0" lang="zh-CN" altLang="en-US" sz="900" b="0" i="0" u="none" strike="noStrike" kern="1200" cap="none" spc="0" normalizeH="0" baseline="0" noProof="0" dirty="0">
@@ -32854,7 +32816,7 @@
                 <a:ea typeface="等线" panose="02010600030101010101" pitchFamily="2" charset="-122"/>
                 <a:cs typeface="+mn-cs"/>
               </a:rPr>
-              <a:t>            |--</a:t>
+              <a:t>     |--</a:t>
             </a:r>
             <a:r>
               <a:rPr kumimoji="0" lang="zh-CN" altLang="en-US" sz="900" b="0" i="0" u="none" strike="noStrike" kern="1200" cap="none" spc="0" normalizeH="0" baseline="0" noProof="0" dirty="0">
@@ -32921,7 +32883,7 @@
                 <a:ea typeface="等线" panose="02010600030101010101" pitchFamily="2" charset="-122"/>
                 <a:cs typeface="+mn-cs"/>
               </a:rPr>
-              <a:t>            |--</a:t>
+              <a:t>     |--</a:t>
             </a:r>
             <a:r>
               <a:rPr kumimoji="0" lang="zh-CN" altLang="en-US" sz="900" b="0" i="0" u="none" strike="noStrike" kern="1200" cap="none" spc="0" normalizeH="0" baseline="0" noProof="0" dirty="0">
@@ -32988,7 +32950,7 @@
                 <a:ea typeface="等线" panose="02010600030101010101" pitchFamily="2" charset="-122"/>
                 <a:cs typeface="+mn-cs"/>
               </a:rPr>
-              <a:t>            |--</a:t>
+              <a:t>     |--</a:t>
             </a:r>
             <a:r>
               <a:rPr kumimoji="0" lang="zh-CN" altLang="en-US" sz="900" b="0" i="0" u="none" strike="noStrike" kern="1200" cap="none" spc="0" normalizeH="0" baseline="0" noProof="0" dirty="0">
@@ -33055,7 +33017,7 @@
                 <a:ea typeface="等线" panose="02010600030101010101" pitchFamily="2" charset="-122"/>
                 <a:cs typeface="+mn-cs"/>
               </a:rPr>
-              <a:t>            |--API/MCP/SQL</a:t>
+              <a:t>     |--API/MCP</a:t>
             </a:r>
           </a:p>
         </p:txBody>
@@ -33572,7 +33534,7 @@
                 <a:ea typeface="微软雅黑" panose="020B0503020204020204" pitchFamily="34" charset="-122"/>
                 <a:cs typeface="+mn-cs"/>
               </a:rPr>
-              <a:t>校验规则：</a:t>
+              <a:t>规则：</a:t>
             </a:r>
             <a:endParaRPr kumimoji="0" lang="en-US" altLang="zh-CN" sz="900" b="1" i="0" u="none" strike="noStrike" kern="1200" cap="none" spc="0" normalizeH="0" baseline="0" noProof="0" dirty="0">
               <a:ln>
@@ -33622,7 +33584,7 @@
                 <a:ea typeface="等线" panose="02010600030101010101" pitchFamily="2" charset="-122"/>
                 <a:cs typeface="+mn-cs"/>
               </a:rPr>
-              <a:t>      |--</a:t>
+              <a:t>|--</a:t>
             </a:r>
             <a:r>
               <a:rPr kumimoji="0" lang="zh-CN" altLang="en-US" sz="900" b="0" i="0" u="none" strike="noStrike" kern="1200" cap="none" spc="0" normalizeH="0" baseline="0" noProof="0" dirty="0">
@@ -33791,7 +33753,7 @@
                 <a:ea typeface="等线" panose="02010600030101010101" pitchFamily="2" charset="-122"/>
                 <a:cs typeface="+mn-cs"/>
               </a:rPr>
-              <a:t>      |--</a:t>
+              <a:t>|--</a:t>
             </a:r>
             <a:r>
               <a:rPr kumimoji="0" lang="zh-CN" altLang="en-US" sz="900" b="0" i="0" u="none" strike="noStrike" kern="1200" cap="none" spc="0" normalizeH="0" baseline="0" noProof="0" dirty="0">
@@ -33914,23 +33876,6 @@
               <a:defRPr/>
             </a:pPr>
             <a:r>
-              <a:rPr kumimoji="0" lang="zh-CN" altLang="en-US" sz="900" b="0" i="0" u="none" strike="noStrike" kern="1200" cap="none" spc="0" normalizeH="0" baseline="0" noProof="0" dirty="0">
-                <a:ln>
-                  <a:noFill/>
-                </a:ln>
-                <a:solidFill>
-                  <a:prstClr val="black"/>
-                </a:solidFill>
-                <a:effectLst/>
-                <a:uLnTx/>
-                <a:uFillTx/>
-                <a:latin typeface="Calibri" panose="020F0502020204030204"/>
-                <a:ea typeface="等线" panose="02010600030101010101" pitchFamily="2" charset="-122"/>
-                <a:cs typeface="+mn-cs"/>
-              </a:rPr>
-              <a:t> </a:t>
-            </a:r>
-            <a:r>
               <a:rPr kumimoji="0" lang="en-US" altLang="zh-CN" sz="900" b="0" i="0" u="none" strike="noStrike" kern="1200" cap="none" spc="0" normalizeH="0" baseline="0" noProof="0" dirty="0">
                 <a:ln>
                   <a:noFill/>
@@ -34069,23 +34014,6 @@
               <a:defRPr/>
             </a:pPr>
             <a:r>
-              <a:rPr kumimoji="0" lang="zh-CN" altLang="en-US" sz="900" b="0" i="0" u="none" strike="noStrike" kern="1200" cap="none" spc="0" normalizeH="0" baseline="0" noProof="0" dirty="0">
-                <a:ln>
-                  <a:noFill/>
-                </a:ln>
-                <a:solidFill>
-                  <a:prstClr val="black"/>
-                </a:solidFill>
-                <a:effectLst/>
-                <a:uLnTx/>
-                <a:uFillTx/>
-                <a:latin typeface="Calibri" panose="020F0502020204030204"/>
-                <a:ea typeface="等线" panose="02010600030101010101" pitchFamily="2" charset="-122"/>
-                <a:cs typeface="+mn-cs"/>
-              </a:rPr>
-              <a:t> </a:t>
-            </a:r>
-            <a:r>
               <a:rPr kumimoji="0" lang="en-US" altLang="zh-CN" sz="900" b="0" i="0" u="none" strike="noStrike" kern="1200" cap="none" spc="0" normalizeH="0" baseline="0" noProof="0" dirty="0">
                 <a:ln>
                   <a:noFill/>
@@ -34238,7 +34166,7 @@
                 <a:ea typeface="微软雅黑" panose="020B0503020204020204" pitchFamily="34" charset="-122"/>
                 <a:cs typeface="+mn-cs"/>
               </a:rPr>
-              <a:t>事务边界：</a:t>
+              <a:t>行为边界：</a:t>
             </a:r>
             <a:endParaRPr kumimoji="0" lang="en-US" altLang="zh-CN" sz="900" b="1" i="0" u="none" strike="noStrike" kern="1200" cap="none" spc="0" normalizeH="0" baseline="0" noProof="0" dirty="0">
               <a:ln>
@@ -34339,7 +34267,7 @@
                 <a:ea typeface="等线" panose="02010600030101010101" pitchFamily="2" charset="-122"/>
                 <a:cs typeface="+mn-cs"/>
               </a:rPr>
-              <a:t>下达工单 的事务边界</a:t>
+              <a:t>生产订单下达 的行为边界</a:t>
             </a:r>
             <a:endParaRPr kumimoji="0" lang="en-US" altLang="zh-CN" sz="900" b="0" i="0" u="none" strike="noStrike" kern="1200" cap="none" spc="0" normalizeH="0" baseline="0" noProof="0" dirty="0">
               <a:ln>
@@ -34552,7 +34480,7 @@
                 <a:ea typeface="等线" panose="02010600030101010101" pitchFamily="2" charset="-122"/>
                 <a:cs typeface="+mn-cs"/>
               </a:rPr>
-              <a:t>      |--</a:t>
+              <a:t>|--</a:t>
             </a:r>
             <a:r>
               <a:rPr kumimoji="0" lang="zh-CN" altLang="en-US" sz="900" b="0" i="0" u="none" strike="noStrike" kern="1200" cap="none" spc="0" normalizeH="0" baseline="0" noProof="0" dirty="0">
@@ -34619,7 +34547,7 @@
                 <a:ea typeface="等线" panose="02010600030101010101" pitchFamily="2" charset="-122"/>
                 <a:cs typeface="+mn-cs"/>
               </a:rPr>
-              <a:t>      |--</a:t>
+              <a:t>|--</a:t>
             </a:r>
             <a:r>
               <a:rPr kumimoji="0" lang="zh-CN" altLang="en-US" sz="900" b="0" i="0" u="none" strike="noStrike" kern="1200" cap="none" spc="0" normalizeH="0" baseline="0" noProof="0" dirty="0">
@@ -34686,7 +34614,7 @@
                 <a:ea typeface="等线" panose="02010600030101010101" pitchFamily="2" charset="-122"/>
                 <a:cs typeface="+mn-cs"/>
               </a:rPr>
-              <a:t>      |--</a:t>
+              <a:t>|--</a:t>
             </a:r>
             <a:r>
               <a:rPr kumimoji="0" lang="zh-CN" altLang="en-US" sz="900" b="0" i="0" u="none" strike="noStrike" kern="1200" cap="none" spc="0" normalizeH="0" baseline="0" noProof="0" dirty="0">
@@ -34753,7 +34681,7 @@
                 <a:ea typeface="等线" panose="02010600030101010101" pitchFamily="2" charset="-122"/>
                 <a:cs typeface="+mn-cs"/>
               </a:rPr>
-              <a:t>      |--</a:t>
+              <a:t>|--</a:t>
             </a:r>
             <a:r>
               <a:rPr kumimoji="0" lang="zh-CN" altLang="en-US" sz="900" b="0" i="0" u="none" strike="noStrike" kern="1200" cap="none" spc="0" normalizeH="0" baseline="0" noProof="0" dirty="0">
@@ -34820,7 +34748,7 @@
                 <a:ea typeface="等线" panose="02010600030101010101" pitchFamily="2" charset="-122"/>
                 <a:cs typeface="+mn-cs"/>
               </a:rPr>
-              <a:t>      |--</a:t>
+              <a:t>|--</a:t>
             </a:r>
             <a:r>
               <a:rPr kumimoji="0" lang="zh-CN" altLang="en-US" sz="900" b="0" i="0" u="none" strike="noStrike" kern="1200" cap="none" spc="0" normalizeH="0" baseline="0" noProof="0" dirty="0">
@@ -34873,7 +34801,7 @@
                 <a:ea typeface="等线" panose="02010600030101010101" pitchFamily="2" charset="-122"/>
                 <a:cs typeface="+mn-cs"/>
               </a:rPr>
-              <a:t>      |--</a:t>
+              <a:t>|--</a:t>
             </a:r>
             <a:r>
               <a:rPr kumimoji="0" lang="zh-CN" altLang="en-US" sz="900" b="0" i="0" u="none" strike="noStrike" kern="1200" cap="none" spc="0" normalizeH="0" baseline="0" noProof="0" dirty="0">
@@ -36376,7 +36304,7 @@
               <a:buNone/>
             </a:pPr>
             <a:r>
-              <a:rPr lang="en-US" sz="2200" b="1" dirty="0">
+              <a:rPr lang="en-US" sz="2200" b="1" dirty="0" err="1">
                 <a:solidFill>
                   <a:srgbClr val="1E293B"/>
                 </a:solidFill>
@@ -36384,10 +36312,10 @@
                 <a:ea typeface="Arial" pitchFamily="34" charset="-122"/>
                 <a:cs typeface="Arial" pitchFamily="34" charset="-120"/>
               </a:rPr>
-              <a:t>治理层 &amp; </a:t>
-            </a:r>
-            <a:r>
-              <a:rPr lang="zh-CN" altLang="en-US" sz="2200" b="1" dirty="0">
+              <a:t>治理层</a:t>
+            </a:r>
+            <a:r>
+              <a:rPr lang="en-US" sz="2200" b="1" dirty="0">
                 <a:solidFill>
                   <a:srgbClr val="1E293B"/>
                 </a:solidFill>
@@ -36395,7 +36323,62 @@
                 <a:ea typeface="Arial" pitchFamily="34" charset="-122"/>
                 <a:cs typeface="Arial" pitchFamily="34" charset="-120"/>
               </a:rPr>
-              <a:t>制品管理</a:t>
+              <a:t> </a:t>
+            </a:r>
+            <a:r>
+              <a:rPr lang="zh-CN" altLang="en-US" sz="2200" b="1" dirty="0">
+                <a:solidFill>
+                  <a:srgbClr val="1E293B"/>
+                </a:solidFill>
+                <a:latin typeface="Arial" pitchFamily="34" charset="0"/>
+                <a:ea typeface="Arial" pitchFamily="34" charset="-122"/>
+                <a:cs typeface="Arial" pitchFamily="34" charset="-120"/>
+              </a:rPr>
+              <a:t>（</a:t>
+            </a:r>
+            <a:r>
+              <a:rPr lang="en-US" altLang="zh-CN" sz="2200" b="1" dirty="0">
+                <a:solidFill>
+                  <a:srgbClr val="1E293B"/>
+                </a:solidFill>
+                <a:latin typeface="Arial" pitchFamily="34" charset="0"/>
+                <a:ea typeface="Arial" pitchFamily="34" charset="-122"/>
+                <a:cs typeface="Arial" pitchFamily="34" charset="-120"/>
+              </a:rPr>
+              <a:t>MCP Server</a:t>
+            </a:r>
+            <a:r>
+              <a:rPr lang="zh-CN" altLang="en-US" sz="2200" b="1" dirty="0">
+                <a:solidFill>
+                  <a:srgbClr val="1E293B"/>
+                </a:solidFill>
+                <a:latin typeface="Arial" pitchFamily="34" charset="0"/>
+                <a:ea typeface="Arial" pitchFamily="34" charset="-122"/>
+                <a:cs typeface="Arial" pitchFamily="34" charset="-120"/>
+              </a:rPr>
+              <a:t>和后端应用</a:t>
+            </a:r>
+            <a:r>
+              <a:rPr lang="en-US" altLang="zh-CN" sz="2200" b="1" dirty="0">
+                <a:solidFill>
+                  <a:srgbClr val="1E293B"/>
+                </a:solidFill>
+                <a:latin typeface="Arial" pitchFamily="34" charset="0"/>
+                <a:ea typeface="Arial" pitchFamily="34" charset="-122"/>
+                <a:cs typeface="Arial" pitchFamily="34" charset="-120"/>
+              </a:rPr>
+              <a:t>API</a:t>
+            </a:r>
+            <a:r>
+              <a:rPr lang="zh-CN" altLang="en-US" sz="2200" b="1" dirty="0">
+                <a:solidFill>
+                  <a:srgbClr val="1E293B"/>
+                </a:solidFill>
+                <a:latin typeface="Arial" pitchFamily="34" charset="0"/>
+                <a:ea typeface="Arial" pitchFamily="34" charset="-122"/>
+                <a:cs typeface="Arial" pitchFamily="34" charset="-120"/>
+              </a:rPr>
+              <a:t>）</a:t>
             </a:r>
             <a:endParaRPr lang="en-US" sz="2200" dirty="0"/>
           </a:p>
@@ -36480,7 +36463,7 @@
               <a:buNone/>
             </a:pPr>
             <a:r>
-              <a:rPr lang="en-US" sz="1600" b="1" dirty="0">
+              <a:rPr lang="en-US" sz="1600" b="1" dirty="0" err="1">
                 <a:solidFill>
                   <a:srgbClr val="BB0000"/>
                 </a:solidFill>
@@ -36488,7 +36471,18 @@
                 <a:ea typeface="Arial" pitchFamily="34" charset="-122"/>
                 <a:cs typeface="Arial" pitchFamily="34" charset="-120"/>
               </a:rPr>
-              <a:t>治理层</a:t>
+              <a:t>治理</a:t>
+            </a:r>
+            <a:r>
+              <a:rPr lang="zh-CN" altLang="en-US" sz="1600" b="1" dirty="0">
+                <a:solidFill>
+                  <a:srgbClr val="BB0000"/>
+                </a:solidFill>
+                <a:latin typeface="Arial" pitchFamily="34" charset="0"/>
+                <a:ea typeface="Arial" pitchFamily="34" charset="-122"/>
+                <a:cs typeface="Arial" pitchFamily="34" charset="-120"/>
+              </a:rPr>
+              <a:t>需求</a:t>
             </a:r>
             <a:endParaRPr lang="en-US" sz="1600" dirty="0"/>
           </a:p>
@@ -36502,7 +36496,7 @@
         </p:nvSpPr>
         <p:spPr>
           <a:xfrm>
-            <a:off x="822960" y="2057400"/>
+            <a:off x="731520" y="2641955"/>
             <a:ext cx="3383280" cy="365760"/>
           </a:xfrm>
           <a:prstGeom prst="rect">
@@ -36515,11 +36509,15 @@
           <a:bodyPr wrap="square" lIns="0" tIns="0" rIns="0" bIns="0" rtlCol="0" anchor="ctr"/>
           <a:lstStyle/>
           <a:p>
-            <a:pPr indent="0">
-              <a:buNone/>
-            </a:pPr>
-            <a:r>
-              <a:rPr lang="en-US" sz="1200" dirty="0" err="1">
+            <a:pPr marL="171450" indent="-171450">
+              <a:lnSpc>
+                <a:spcPct val="200000"/>
+              </a:lnSpc>
+              <a:buFont typeface="Arial" panose="020B0604020202020204" pitchFamily="34" charset="0"/>
+              <a:buChar char="•"/>
+            </a:pPr>
+            <a:r>
+              <a:rPr lang="en-US" altLang="zh-CN" sz="1200" dirty="0">
                 <a:solidFill>
                   <a:srgbClr val="1E293B"/>
                 </a:solidFill>
@@ -36527,7 +36525,142 @@
                 <a:ea typeface="黑体" panose="02010609060101010101" pitchFamily="49" charset="-122"/>
                 <a:cs typeface="Arial" pitchFamily="34" charset="-120"/>
               </a:rPr>
-              <a:t>角色定义与权限分配</a:t>
+              <a:t>Agent </a:t>
+            </a:r>
+            <a:r>
+              <a:rPr lang="zh-CN" altLang="en-US" sz="1200" dirty="0">
+                <a:solidFill>
+                  <a:srgbClr val="1E293B"/>
+                </a:solidFill>
+                <a:latin typeface="黑体" panose="02010609060101010101" pitchFamily="49" charset="-122"/>
+                <a:ea typeface="黑体" panose="02010609060101010101" pitchFamily="49" charset="-122"/>
+                <a:cs typeface="Arial" pitchFamily="34" charset="-120"/>
+              </a:rPr>
+              <a:t>能不能看到某个对象？</a:t>
+            </a:r>
+          </a:p>
+          <a:p>
+            <a:pPr marL="171450" indent="-171450">
+              <a:lnSpc>
+                <a:spcPct val="200000"/>
+              </a:lnSpc>
+              <a:buFont typeface="Arial" panose="020B0604020202020204" pitchFamily="34" charset="0"/>
+              <a:buChar char="•"/>
+            </a:pPr>
+            <a:r>
+              <a:rPr lang="en-US" altLang="zh-CN" sz="1200" dirty="0">
+                <a:solidFill>
+                  <a:srgbClr val="1E293B"/>
+                </a:solidFill>
+                <a:latin typeface="黑体" panose="02010609060101010101" pitchFamily="49" charset="-122"/>
+                <a:ea typeface="黑体" panose="02010609060101010101" pitchFamily="49" charset="-122"/>
+                <a:cs typeface="Arial" pitchFamily="34" charset="-120"/>
+              </a:rPr>
+              <a:t>Agent </a:t>
+            </a:r>
+            <a:r>
+              <a:rPr lang="zh-CN" altLang="en-US" sz="1200" dirty="0">
+                <a:solidFill>
+                  <a:srgbClr val="1E293B"/>
+                </a:solidFill>
+                <a:latin typeface="黑体" panose="02010609060101010101" pitchFamily="49" charset="-122"/>
+                <a:ea typeface="黑体" panose="02010609060101010101" pitchFamily="49" charset="-122"/>
+                <a:cs typeface="Arial" pitchFamily="34" charset="-120"/>
+              </a:rPr>
+              <a:t>能不能调用某个行为？</a:t>
+            </a:r>
+          </a:p>
+          <a:p>
+            <a:pPr marL="171450" indent="-171450">
+              <a:lnSpc>
+                <a:spcPct val="200000"/>
+              </a:lnSpc>
+              <a:buFont typeface="Arial" panose="020B0604020202020204" pitchFamily="34" charset="0"/>
+              <a:buChar char="•"/>
+            </a:pPr>
+            <a:r>
+              <a:rPr lang="en-US" altLang="zh-CN" sz="1200" dirty="0">
+                <a:solidFill>
+                  <a:srgbClr val="1E293B"/>
+                </a:solidFill>
+                <a:latin typeface="黑体" panose="02010609060101010101" pitchFamily="49" charset="-122"/>
+                <a:ea typeface="黑体" panose="02010609060101010101" pitchFamily="49" charset="-122"/>
+                <a:cs typeface="Arial" pitchFamily="34" charset="-120"/>
+              </a:rPr>
+              <a:t>Agent </a:t>
+            </a:r>
+            <a:r>
+              <a:rPr lang="zh-CN" altLang="en-US" sz="1200" dirty="0">
+                <a:solidFill>
+                  <a:srgbClr val="1E293B"/>
+                </a:solidFill>
+                <a:latin typeface="黑体" panose="02010609060101010101" pitchFamily="49" charset="-122"/>
+                <a:ea typeface="黑体" panose="02010609060101010101" pitchFamily="49" charset="-122"/>
+                <a:cs typeface="Arial" pitchFamily="34" charset="-120"/>
+              </a:rPr>
+              <a:t>能不能拿到某个字段定义？</a:t>
+            </a:r>
+          </a:p>
+          <a:p>
+            <a:pPr marL="171450" indent="-171450">
+              <a:lnSpc>
+                <a:spcPct val="200000"/>
+              </a:lnSpc>
+              <a:buFont typeface="Arial" panose="020B0604020202020204" pitchFamily="34" charset="0"/>
+              <a:buChar char="•"/>
+            </a:pPr>
+            <a:r>
+              <a:rPr lang="en-US" altLang="zh-CN" sz="1200" dirty="0">
+                <a:solidFill>
+                  <a:srgbClr val="1E293B"/>
+                </a:solidFill>
+                <a:latin typeface="黑体" panose="02010609060101010101" pitchFamily="49" charset="-122"/>
+                <a:ea typeface="黑体" panose="02010609060101010101" pitchFamily="49" charset="-122"/>
+                <a:cs typeface="Arial" pitchFamily="34" charset="-120"/>
+              </a:rPr>
+              <a:t>Agent </a:t>
+            </a:r>
+            <a:r>
+              <a:rPr lang="zh-CN" altLang="en-US" sz="1200" dirty="0">
+                <a:solidFill>
+                  <a:srgbClr val="1E293B"/>
+                </a:solidFill>
+                <a:latin typeface="黑体" panose="02010609060101010101" pitchFamily="49" charset="-122"/>
+                <a:ea typeface="黑体" panose="02010609060101010101" pitchFamily="49" charset="-122"/>
+                <a:cs typeface="Arial" pitchFamily="34" charset="-120"/>
+              </a:rPr>
+              <a:t>的工具列表是否按权限动态裁剪？</a:t>
+            </a:r>
+          </a:p>
+          <a:p>
+            <a:pPr marL="171450" indent="-171450">
+              <a:lnSpc>
+                <a:spcPct val="200000"/>
+              </a:lnSpc>
+              <a:buFont typeface="Arial" panose="020B0604020202020204" pitchFamily="34" charset="0"/>
+              <a:buChar char="•"/>
+            </a:pPr>
+            <a:r>
+              <a:rPr lang="en-US" altLang="zh-CN" sz="1200" dirty="0">
+                <a:solidFill>
+                  <a:srgbClr val="1E293B"/>
+                </a:solidFill>
+                <a:latin typeface="黑体" panose="02010609060101010101" pitchFamily="49" charset="-122"/>
+                <a:ea typeface="黑体" panose="02010609060101010101" pitchFamily="49" charset="-122"/>
+                <a:cs typeface="Arial" pitchFamily="34" charset="-120"/>
+              </a:rPr>
+              <a:t>Agent </a:t>
+            </a:r>
+            <a:r>
+              <a:rPr lang="zh-CN" altLang="en-US" sz="1200" dirty="0">
+                <a:solidFill>
+                  <a:srgbClr val="1E293B"/>
+                </a:solidFill>
+                <a:latin typeface="黑体" panose="02010609060101010101" pitchFamily="49" charset="-122"/>
+                <a:ea typeface="黑体" panose="02010609060101010101" pitchFamily="49" charset="-122"/>
+                <a:cs typeface="Arial" pitchFamily="34" charset="-120"/>
+              </a:rPr>
+              <a:t>请求参数是否符合本体和权限边界？</a:t>
             </a:r>
             <a:endParaRPr lang="en-US" sz="1200" dirty="0">
               <a:solidFill>
@@ -36542,656 +36675,10 @@
       </p:sp>
       <p:sp>
         <p:nvSpPr>
-          <p:cNvPr id="10" name="Shape 8"/>
-          <p:cNvSpPr/>
-          <p:nvPr/>
-        </p:nvSpPr>
-        <p:spPr>
-          <a:xfrm>
-            <a:off x="731520" y="2217420"/>
-            <a:ext cx="54864" cy="54864"/>
-          </a:xfrm>
-          <a:prstGeom prst="rect">
-            <a:avLst/>
-          </a:prstGeom>
-          <a:solidFill>
-            <a:srgbClr val="BB0000"/>
-          </a:solidFill>
-          <a:ln/>
-        </p:spPr>
-        <p:txBody>
-          <a:bodyPr/>
-          <a:lstStyle/>
-          <a:p>
-            <a:endParaRPr lang="zh-CN" altLang="en-US"/>
-          </a:p>
-        </p:txBody>
-      </p:sp>
-      <p:sp>
-        <p:nvSpPr>
-          <p:cNvPr id="11" name="Text 9"/>
-          <p:cNvSpPr/>
-          <p:nvPr/>
-        </p:nvSpPr>
-        <p:spPr>
-          <a:xfrm>
-            <a:off x="822960" y="2459468"/>
-            <a:ext cx="3383280" cy="365760"/>
-          </a:xfrm>
-          <a:prstGeom prst="rect">
-            <a:avLst/>
-          </a:prstGeom>
-          <a:noFill/>
-          <a:ln/>
-        </p:spPr>
-        <p:txBody>
-          <a:bodyPr wrap="square" lIns="0" tIns="0" rIns="0" bIns="0" rtlCol="0" anchor="ctr"/>
-          <a:lstStyle/>
-          <a:p>
-            <a:r>
-              <a:rPr lang="en-US" sz="1200" dirty="0">
-                <a:solidFill>
-                  <a:srgbClr val="1E293B"/>
-                </a:solidFill>
-                <a:latin typeface="黑体" panose="02010609060101010101" pitchFamily="49" charset="-122"/>
-                <a:ea typeface="黑体" panose="02010609060101010101" pitchFamily="49" charset="-122"/>
-                <a:cs typeface="Arial" pitchFamily="34" charset="-120"/>
-              </a:rPr>
-              <a:t>对象级权限 (</a:t>
-            </a:r>
-            <a:r>
-              <a:rPr lang="en-US" sz="1200" dirty="0" err="1">
-                <a:solidFill>
-                  <a:srgbClr val="1E293B"/>
-                </a:solidFill>
-                <a:latin typeface="黑体" panose="02010609060101010101" pitchFamily="49" charset="-122"/>
-                <a:ea typeface="黑体" panose="02010609060101010101" pitchFamily="49" charset="-122"/>
-                <a:cs typeface="Arial" pitchFamily="34" charset="-120"/>
-              </a:rPr>
-              <a:t>行级访问控制</a:t>
-            </a:r>
-            <a:r>
-              <a:rPr lang="en-US" sz="1200" dirty="0">
-                <a:solidFill>
-                  <a:srgbClr val="1E293B"/>
-                </a:solidFill>
-                <a:latin typeface="黑体" panose="02010609060101010101" pitchFamily="49" charset="-122"/>
-                <a:ea typeface="黑体" panose="02010609060101010101" pitchFamily="49" charset="-122"/>
-                <a:cs typeface="Arial" pitchFamily="34" charset="-120"/>
-              </a:rPr>
-              <a:t>)</a:t>
-            </a:r>
-          </a:p>
-        </p:txBody>
-      </p:sp>
-      <p:sp>
-        <p:nvSpPr>
-          <p:cNvPr id="12" name="Shape 10"/>
-          <p:cNvSpPr/>
-          <p:nvPr/>
-        </p:nvSpPr>
-        <p:spPr>
-          <a:xfrm>
-            <a:off x="731520" y="2612105"/>
-            <a:ext cx="54864" cy="54864"/>
-          </a:xfrm>
-          <a:prstGeom prst="rect">
-            <a:avLst/>
-          </a:prstGeom>
-          <a:solidFill>
-            <a:srgbClr val="BB0000"/>
-          </a:solidFill>
-          <a:ln/>
-        </p:spPr>
-        <p:txBody>
-          <a:bodyPr/>
-          <a:lstStyle/>
-          <a:p>
-            <a:endParaRPr lang="zh-CN" altLang="en-US"/>
-          </a:p>
-        </p:txBody>
-      </p:sp>
-      <p:sp>
-        <p:nvSpPr>
-          <p:cNvPr id="13" name="Text 11"/>
-          <p:cNvSpPr/>
-          <p:nvPr/>
-        </p:nvSpPr>
-        <p:spPr>
-          <a:xfrm>
-            <a:off x="822960" y="2861536"/>
-            <a:ext cx="3383280" cy="365760"/>
-          </a:xfrm>
-          <a:prstGeom prst="rect">
-            <a:avLst/>
-          </a:prstGeom>
-          <a:noFill/>
-          <a:ln/>
-        </p:spPr>
-        <p:txBody>
-          <a:bodyPr wrap="square" lIns="0" tIns="0" rIns="0" bIns="0" rtlCol="0" anchor="ctr"/>
-          <a:lstStyle/>
-          <a:p>
-            <a:r>
-              <a:rPr lang="en-US" sz="1200" dirty="0">
-                <a:solidFill>
-                  <a:srgbClr val="1E293B"/>
-                </a:solidFill>
-                <a:latin typeface="黑体" panose="02010609060101010101" pitchFamily="49" charset="-122"/>
-                <a:ea typeface="黑体" panose="02010609060101010101" pitchFamily="49" charset="-122"/>
-                <a:cs typeface="Arial" pitchFamily="34" charset="-120"/>
-              </a:rPr>
-              <a:t>字段级权限 (</a:t>
-            </a:r>
-            <a:r>
-              <a:rPr lang="en-US" sz="1200" dirty="0" err="1">
-                <a:solidFill>
-                  <a:srgbClr val="1E293B"/>
-                </a:solidFill>
-                <a:latin typeface="黑体" panose="02010609060101010101" pitchFamily="49" charset="-122"/>
-                <a:ea typeface="黑体" panose="02010609060101010101" pitchFamily="49" charset="-122"/>
-                <a:cs typeface="Arial" pitchFamily="34" charset="-120"/>
-              </a:rPr>
-              <a:t>敏感字段脱敏</a:t>
-            </a:r>
-            <a:r>
-              <a:rPr lang="en-US" sz="1200" dirty="0">
-                <a:solidFill>
-                  <a:srgbClr val="1E293B"/>
-                </a:solidFill>
-                <a:latin typeface="黑体" panose="02010609060101010101" pitchFamily="49" charset="-122"/>
-                <a:ea typeface="黑体" panose="02010609060101010101" pitchFamily="49" charset="-122"/>
-                <a:cs typeface="Arial" pitchFamily="34" charset="-120"/>
-              </a:rPr>
-              <a:t>)</a:t>
-            </a:r>
-          </a:p>
-        </p:txBody>
-      </p:sp>
-      <p:sp>
-        <p:nvSpPr>
-          <p:cNvPr id="14" name="Shape 12"/>
-          <p:cNvSpPr/>
-          <p:nvPr/>
-        </p:nvSpPr>
-        <p:spPr>
-          <a:xfrm>
-            <a:off x="731520" y="3006790"/>
-            <a:ext cx="54864" cy="54864"/>
-          </a:xfrm>
-          <a:prstGeom prst="rect">
-            <a:avLst/>
-          </a:prstGeom>
-          <a:solidFill>
-            <a:srgbClr val="BB0000"/>
-          </a:solidFill>
-          <a:ln/>
-        </p:spPr>
-        <p:txBody>
-          <a:bodyPr/>
-          <a:lstStyle/>
-          <a:p>
-            <a:endParaRPr lang="zh-CN" altLang="en-US"/>
-          </a:p>
-        </p:txBody>
-      </p:sp>
-      <p:sp>
-        <p:nvSpPr>
-          <p:cNvPr id="15" name="Text 13"/>
-          <p:cNvSpPr/>
-          <p:nvPr/>
-        </p:nvSpPr>
-        <p:spPr>
-          <a:xfrm>
-            <a:off x="822960" y="3263604"/>
-            <a:ext cx="3383280" cy="365760"/>
-          </a:xfrm>
-          <a:prstGeom prst="rect">
-            <a:avLst/>
-          </a:prstGeom>
-          <a:noFill/>
-          <a:ln/>
-        </p:spPr>
-        <p:txBody>
-          <a:bodyPr wrap="square" lIns="0" tIns="0" rIns="0" bIns="0" rtlCol="0" anchor="ctr"/>
-          <a:lstStyle/>
-          <a:p>
-            <a:r>
-              <a:rPr lang="en-US" sz="1200" dirty="0">
-                <a:solidFill>
-                  <a:srgbClr val="1E293B"/>
-                </a:solidFill>
-                <a:latin typeface="黑体" panose="02010609060101010101" pitchFamily="49" charset="-122"/>
-                <a:ea typeface="黑体" panose="02010609060101010101" pitchFamily="49" charset="-122"/>
-                <a:cs typeface="Arial" pitchFamily="34" charset="-120"/>
-              </a:rPr>
-              <a:t>条件权限 (</a:t>
-            </a:r>
-            <a:r>
-              <a:rPr lang="en-US" sz="1200" dirty="0" err="1">
-                <a:solidFill>
-                  <a:srgbClr val="1E293B"/>
-                </a:solidFill>
-                <a:latin typeface="黑体" panose="02010609060101010101" pitchFamily="49" charset="-122"/>
-                <a:ea typeface="黑体" panose="02010609060101010101" pitchFamily="49" charset="-122"/>
-                <a:cs typeface="Arial" pitchFamily="34" charset="-120"/>
-              </a:rPr>
-              <a:t>上下文感知授权</a:t>
-            </a:r>
-            <a:r>
-              <a:rPr lang="en-US" sz="1200" dirty="0">
-                <a:solidFill>
-                  <a:srgbClr val="1E293B"/>
-                </a:solidFill>
-                <a:latin typeface="黑体" panose="02010609060101010101" pitchFamily="49" charset="-122"/>
-                <a:ea typeface="黑体" panose="02010609060101010101" pitchFamily="49" charset="-122"/>
-                <a:cs typeface="Arial" pitchFamily="34" charset="-120"/>
-              </a:rPr>
-              <a:t>)</a:t>
-            </a:r>
-          </a:p>
-        </p:txBody>
-      </p:sp>
-      <p:sp>
-        <p:nvSpPr>
-          <p:cNvPr id="16" name="Shape 14"/>
-          <p:cNvSpPr/>
-          <p:nvPr/>
-        </p:nvSpPr>
-        <p:spPr>
-          <a:xfrm>
-            <a:off x="731520" y="3401475"/>
-            <a:ext cx="54864" cy="54864"/>
-          </a:xfrm>
-          <a:prstGeom prst="rect">
-            <a:avLst/>
-          </a:prstGeom>
-          <a:solidFill>
-            <a:srgbClr val="BB0000"/>
-          </a:solidFill>
-          <a:ln/>
-        </p:spPr>
-        <p:txBody>
-          <a:bodyPr/>
-          <a:lstStyle/>
-          <a:p>
-            <a:endParaRPr lang="zh-CN" altLang="en-US"/>
-          </a:p>
-        </p:txBody>
-      </p:sp>
-      <p:sp>
-        <p:nvSpPr>
-          <p:cNvPr id="17" name="Text 15"/>
-          <p:cNvSpPr/>
-          <p:nvPr/>
-        </p:nvSpPr>
-        <p:spPr>
-          <a:xfrm>
-            <a:off x="822960" y="3665672"/>
-            <a:ext cx="3383280" cy="365760"/>
-          </a:xfrm>
-          <a:prstGeom prst="rect">
-            <a:avLst/>
-          </a:prstGeom>
-          <a:noFill/>
-          <a:ln/>
-        </p:spPr>
-        <p:txBody>
-          <a:bodyPr wrap="square" lIns="0" tIns="0" rIns="0" bIns="0" rtlCol="0" anchor="ctr"/>
-          <a:lstStyle/>
-          <a:p>
-            <a:r>
-              <a:rPr lang="en-US" sz="1200" dirty="0">
-                <a:solidFill>
-                  <a:srgbClr val="1E293B"/>
-                </a:solidFill>
-                <a:latin typeface="黑体" panose="02010609060101010101" pitchFamily="49" charset="-122"/>
-                <a:ea typeface="黑体" panose="02010609060101010101" pitchFamily="49" charset="-122"/>
-                <a:cs typeface="Arial" pitchFamily="34" charset="-120"/>
-              </a:rPr>
-              <a:t>AI Agent 沙箱 (</a:t>
-            </a:r>
-            <a:r>
-              <a:rPr lang="en-US" sz="1200" dirty="0" err="1">
-                <a:solidFill>
-                  <a:srgbClr val="1E293B"/>
-                </a:solidFill>
-                <a:latin typeface="黑体" panose="02010609060101010101" pitchFamily="49" charset="-122"/>
-                <a:ea typeface="黑体" panose="02010609060101010101" pitchFamily="49" charset="-122"/>
-                <a:cs typeface="Arial" pitchFamily="34" charset="-120"/>
-              </a:rPr>
-              <a:t>隔离执行环境</a:t>
-            </a:r>
-            <a:r>
-              <a:rPr lang="en-US" sz="1200" dirty="0">
-                <a:solidFill>
-                  <a:srgbClr val="1E293B"/>
-                </a:solidFill>
-                <a:latin typeface="黑体" panose="02010609060101010101" pitchFamily="49" charset="-122"/>
-                <a:ea typeface="黑体" panose="02010609060101010101" pitchFamily="49" charset="-122"/>
-                <a:cs typeface="Arial" pitchFamily="34" charset="-120"/>
-              </a:rPr>
-              <a:t>)</a:t>
-            </a:r>
-          </a:p>
-        </p:txBody>
-      </p:sp>
-      <p:sp>
-        <p:nvSpPr>
-          <p:cNvPr id="18" name="Shape 16"/>
-          <p:cNvSpPr/>
-          <p:nvPr/>
-        </p:nvSpPr>
-        <p:spPr>
-          <a:xfrm>
-            <a:off x="731520" y="3796160"/>
-            <a:ext cx="54864" cy="54864"/>
-          </a:xfrm>
-          <a:prstGeom prst="rect">
-            <a:avLst/>
-          </a:prstGeom>
-          <a:solidFill>
-            <a:srgbClr val="BB0000"/>
-          </a:solidFill>
-          <a:ln/>
-        </p:spPr>
-        <p:txBody>
-          <a:bodyPr/>
-          <a:lstStyle/>
-          <a:p>
-            <a:endParaRPr lang="zh-CN" altLang="en-US"/>
-          </a:p>
-        </p:txBody>
-      </p:sp>
-      <p:sp>
-        <p:nvSpPr>
-          <p:cNvPr id="19" name="Shape 17"/>
-          <p:cNvSpPr/>
-          <p:nvPr/>
-        </p:nvSpPr>
-        <p:spPr>
-          <a:xfrm>
-            <a:off x="4754880" y="1463040"/>
-            <a:ext cx="3840480" cy="2926080"/>
-          </a:xfrm>
-          <a:prstGeom prst="rect">
-            <a:avLst/>
-          </a:prstGeom>
-          <a:solidFill>
-            <a:srgbClr val="F1F5F9"/>
-          </a:solidFill>
-          <a:ln/>
-        </p:spPr>
-        <p:txBody>
-          <a:bodyPr/>
-          <a:lstStyle/>
-          <a:p>
-            <a:endParaRPr lang="zh-CN" altLang="en-US"/>
-          </a:p>
-        </p:txBody>
-      </p:sp>
-      <p:sp>
-        <p:nvSpPr>
-          <p:cNvPr id="20" name="Shape 18"/>
-          <p:cNvSpPr/>
-          <p:nvPr/>
-        </p:nvSpPr>
-        <p:spPr>
-          <a:xfrm>
-            <a:off x="4754880" y="1463040"/>
-            <a:ext cx="3840480" cy="54864"/>
-          </a:xfrm>
-          <a:prstGeom prst="rect">
-            <a:avLst/>
-          </a:prstGeom>
-          <a:solidFill>
-            <a:srgbClr val="22A699"/>
-          </a:solidFill>
-          <a:ln/>
-        </p:spPr>
-        <p:txBody>
-          <a:bodyPr/>
-          <a:lstStyle/>
-          <a:p>
-            <a:endParaRPr lang="zh-CN" altLang="en-US"/>
-          </a:p>
-        </p:txBody>
-      </p:sp>
-      <p:sp>
-        <p:nvSpPr>
-          <p:cNvPr id="21" name="Text 19"/>
-          <p:cNvSpPr/>
-          <p:nvPr/>
-        </p:nvSpPr>
-        <p:spPr>
-          <a:xfrm>
-            <a:off x="4937760" y="1600200"/>
-            <a:ext cx="3474720" cy="320040"/>
-          </a:xfrm>
-          <a:prstGeom prst="rect">
-            <a:avLst/>
-          </a:prstGeom>
-          <a:noFill/>
-          <a:ln/>
-        </p:spPr>
-        <p:txBody>
-          <a:bodyPr wrap="square" lIns="0" tIns="0" rIns="0" bIns="0" rtlCol="0" anchor="ctr"/>
-          <a:lstStyle/>
-          <a:p>
-            <a:pPr marL="0" indent="0">
-              <a:buNone/>
-            </a:pPr>
-            <a:r>
-              <a:rPr lang="zh-CN" altLang="en-US" sz="1600" b="1" dirty="0">
-                <a:solidFill>
-                  <a:srgbClr val="22A699"/>
-                </a:solidFill>
-                <a:latin typeface="Arial" pitchFamily="34" charset="0"/>
-                <a:ea typeface="Arial" pitchFamily="34" charset="-122"/>
-                <a:cs typeface="Arial" pitchFamily="34" charset="-120"/>
-              </a:rPr>
-              <a:t>制品管理</a:t>
-            </a:r>
-            <a:endParaRPr lang="en-US" sz="1600" dirty="0"/>
-          </a:p>
-        </p:txBody>
-      </p:sp>
-      <p:sp>
-        <p:nvSpPr>
-          <p:cNvPr id="22" name="Text 20"/>
-          <p:cNvSpPr/>
-          <p:nvPr/>
-        </p:nvSpPr>
-        <p:spPr>
-          <a:xfrm>
-            <a:off x="4937760" y="1965960"/>
-            <a:ext cx="3474720" cy="274320"/>
-          </a:xfrm>
-          <a:prstGeom prst="rect">
-            <a:avLst/>
-          </a:prstGeom>
-          <a:noFill/>
-          <a:ln/>
-        </p:spPr>
-        <p:txBody>
-          <a:bodyPr wrap="square" lIns="0" tIns="0" rIns="0" bIns="0" rtlCol="0" anchor="ctr"/>
-          <a:lstStyle/>
-          <a:p>
-            <a:pPr marL="0" indent="0">
-              <a:buNone/>
-            </a:pPr>
-            <a:r>
-              <a:rPr lang="en-US" sz="1200" dirty="0">
-                <a:solidFill>
-                  <a:srgbClr val="64748B"/>
-                </a:solidFill>
-                <a:latin typeface="Arial" pitchFamily="34" charset="0"/>
-                <a:ea typeface="Arial" pitchFamily="34" charset="-122"/>
-                <a:cs typeface="Arial" pitchFamily="34" charset="-120"/>
-              </a:rPr>
-              <a:t>本体编译后的版本化发布结构</a:t>
-            </a:r>
-            <a:endParaRPr lang="en-US" sz="1200" dirty="0"/>
-          </a:p>
-        </p:txBody>
-      </p:sp>
-      <p:sp>
-        <p:nvSpPr>
-          <p:cNvPr id="23" name="Shape 21"/>
-          <p:cNvSpPr/>
-          <p:nvPr/>
-        </p:nvSpPr>
-        <p:spPr>
-          <a:xfrm>
-            <a:off x="4937760" y="2377440"/>
-            <a:ext cx="3474720" cy="1828800"/>
-          </a:xfrm>
-          <a:prstGeom prst="rect">
-            <a:avLst/>
-          </a:prstGeom>
-          <a:solidFill>
-            <a:srgbClr val="1E293B"/>
-          </a:solidFill>
-          <a:ln/>
-        </p:spPr>
-        <p:txBody>
-          <a:bodyPr/>
-          <a:lstStyle/>
-          <a:p>
-            <a:endParaRPr lang="zh-CN" altLang="en-US"/>
-          </a:p>
-        </p:txBody>
-      </p:sp>
-      <p:sp>
-        <p:nvSpPr>
-          <p:cNvPr id="24" name="Text 22"/>
-          <p:cNvSpPr/>
-          <p:nvPr/>
-        </p:nvSpPr>
-        <p:spPr>
-          <a:xfrm>
-            <a:off x="5029200" y="2468880"/>
-            <a:ext cx="3291840" cy="1645920"/>
-          </a:xfrm>
-          <a:prstGeom prst="rect">
-            <a:avLst/>
-          </a:prstGeom>
-          <a:noFill/>
-          <a:ln/>
-        </p:spPr>
-        <p:txBody>
-          <a:bodyPr wrap="square" lIns="50800" tIns="50800" rIns="50800" bIns="50800" rtlCol="0" anchor="t"/>
-          <a:lstStyle/>
-          <a:p>
-            <a:pPr marL="0" indent="0">
-              <a:buNone/>
-            </a:pPr>
-            <a:r>
-              <a:rPr lang="en-US" sz="1100" dirty="0">
-                <a:solidFill>
-                  <a:srgbClr val="94A3B8"/>
-                </a:solidFill>
-                <a:latin typeface="Consolas" pitchFamily="34" charset="0"/>
-                <a:ea typeface="Consolas" pitchFamily="34" charset="-122"/>
-                <a:cs typeface="Consolas" pitchFamily="34" charset="-120"/>
-              </a:rPr>
-              <a:t>{</a:t>
-            </a:r>
-            <a:endParaRPr lang="en-US" sz="1100" dirty="0"/>
-          </a:p>
-          <a:p>
-            <a:pPr marL="0" indent="0">
-              <a:buNone/>
-            </a:pPr>
-            <a:r>
-              <a:rPr lang="en-US" sz="1100" dirty="0">
-                <a:solidFill>
-                  <a:srgbClr val="22A699"/>
-                </a:solidFill>
-                <a:latin typeface="Consolas" pitchFamily="34" charset="0"/>
-                <a:ea typeface="Consolas" pitchFamily="34" charset="-122"/>
-                <a:cs typeface="Consolas" pitchFamily="34" charset="-120"/>
-              </a:rPr>
-              <a:t>  "version": "1.2.0",</a:t>
-            </a:r>
-            <a:endParaRPr lang="en-US" sz="1100" dirty="0"/>
-          </a:p>
-          <a:p>
-            <a:pPr marL="0" indent="0">
-              <a:buNone/>
-            </a:pPr>
-            <a:r>
-              <a:rPr lang="en-US" sz="1100" dirty="0">
-                <a:solidFill>
-                  <a:srgbClr val="22A699"/>
-                </a:solidFill>
-                <a:latin typeface="Consolas" pitchFamily="34" charset="0"/>
-                <a:ea typeface="Consolas" pitchFamily="34" charset="-122"/>
-                <a:cs typeface="Consolas" pitchFamily="34" charset="-120"/>
-              </a:rPr>
-              <a:t>  "tools": [...],</a:t>
-            </a:r>
-            <a:endParaRPr lang="en-US" sz="1100" dirty="0"/>
-          </a:p>
-          <a:p>
-            <a:pPr marL="0" indent="0">
-              <a:buNone/>
-            </a:pPr>
-            <a:r>
-              <a:rPr lang="en-US" sz="1100" dirty="0">
-                <a:solidFill>
-                  <a:srgbClr val="22A699"/>
-                </a:solidFill>
-                <a:latin typeface="Consolas" pitchFamily="34" charset="0"/>
-                <a:ea typeface="Consolas" pitchFamily="34" charset="-122"/>
-                <a:cs typeface="Consolas" pitchFamily="34" charset="-120"/>
-              </a:rPr>
-              <a:t>  "permissions": [...],</a:t>
-            </a:r>
-            <a:endParaRPr lang="en-US" sz="1100" dirty="0"/>
-          </a:p>
-          <a:p>
-            <a:pPr marL="0" indent="0">
-              <a:buNone/>
-            </a:pPr>
-            <a:r>
-              <a:rPr lang="en-US" sz="1100" dirty="0">
-                <a:solidFill>
-                  <a:srgbClr val="22A699"/>
-                </a:solidFill>
-                <a:latin typeface="Consolas" pitchFamily="34" charset="0"/>
-                <a:ea typeface="Consolas" pitchFamily="34" charset="-122"/>
-                <a:cs typeface="Consolas" pitchFamily="34" charset="-120"/>
-              </a:rPr>
-              <a:t>  "constraints": [...],</a:t>
-            </a:r>
-            <a:endParaRPr lang="en-US" sz="1100" dirty="0"/>
-          </a:p>
-          <a:p>
-            <a:pPr marL="0" indent="0">
-              <a:buNone/>
-            </a:pPr>
-            <a:r>
-              <a:rPr lang="en-US" sz="1100" dirty="0">
-                <a:solidFill>
-                  <a:srgbClr val="94A3B8"/>
-                </a:solidFill>
-                <a:latin typeface="Consolas" pitchFamily="34" charset="0"/>
-                <a:ea typeface="Consolas" pitchFamily="34" charset="-122"/>
-                <a:cs typeface="Consolas" pitchFamily="34" charset="-120"/>
-              </a:rPr>
-              <a:t>}</a:t>
-            </a:r>
-            <a:endParaRPr lang="en-US" sz="1100" dirty="0"/>
-          </a:p>
-        </p:txBody>
-      </p:sp>
-      <p:sp>
-        <p:nvSpPr>
-          <p:cNvPr id="26" name="文本框 25">
+          <p:cNvPr id="28" name="文本框 27">
             <a:extLst>
               <a:ext uri="{FF2B5EF4-FFF2-40B4-BE49-F238E27FC236}">
-                <a16:creationId xmlns:a16="http://schemas.microsoft.com/office/drawing/2014/main" id="{D1BDC5E0-F520-C0D1-AC64-CD87A6E9D4DB}"/>
+                <a16:creationId xmlns:a16="http://schemas.microsoft.com/office/drawing/2014/main" id="{2492EEE9-DAC3-7461-F1C7-AA5C42123F4C}"/>
               </a:ext>
             </a:extLst>
           </p:cNvPr>
@@ -37200,8 +36687,8 @@
         </p:nvSpPr>
         <p:spPr>
           <a:xfrm>
-            <a:off x="731520" y="4067740"/>
-            <a:ext cx="3630168" cy="276999"/>
+            <a:off x="4754882" y="1760220"/>
+            <a:ext cx="4017264" cy="1754326"/>
           </a:xfrm>
           <a:prstGeom prst="rect">
             <a:avLst/>
@@ -37223,7 +36710,7 @@
                 <a:ea typeface="黑体" panose="02010609060101010101" pitchFamily="49" charset="-122"/>
                 <a:cs typeface="Arial" pitchFamily="34" charset="-120"/>
               </a:rPr>
-              <a:t>最小权限原则：</a:t>
+              <a:t>治理层横跨 </a:t>
             </a:r>
             <a:r>
               <a:rPr lang="en-US" altLang="zh-CN" sz="1200" dirty="0">
@@ -37234,7 +36721,7 @@
                 <a:ea typeface="黑体" panose="02010609060101010101" pitchFamily="49" charset="-122"/>
                 <a:cs typeface="Arial" pitchFamily="34" charset="-120"/>
               </a:rPr>
-              <a:t>Agent </a:t>
+              <a:t>MCP Server </a:t>
             </a:r>
             <a:r>
               <a:rPr lang="zh-CN" altLang="en-US" sz="1200" dirty="0">
@@ -37245,41 +36732,200 @@
                 <a:ea typeface="黑体" panose="02010609060101010101" pitchFamily="49" charset="-122"/>
                 <a:cs typeface="Arial" pitchFamily="34" charset="-120"/>
               </a:rPr>
-              <a:t>默认无权限，需显式授权</a:t>
-            </a:r>
-          </a:p>
-        </p:txBody>
-      </p:sp>
-      <p:sp>
-        <p:nvSpPr>
-          <p:cNvPr id="27" name="Shape 16">
-            <a:extLst>
-              <a:ext uri="{FF2B5EF4-FFF2-40B4-BE49-F238E27FC236}">
-                <a16:creationId xmlns:a16="http://schemas.microsoft.com/office/drawing/2014/main" id="{02D2CF88-0B81-1ECD-ED0B-9344B424AA6F}"/>
-              </a:ext>
-            </a:extLst>
-          </p:cNvPr>
-          <p:cNvSpPr/>
-          <p:nvPr/>
-        </p:nvSpPr>
-        <p:spPr>
-          <a:xfrm>
-            <a:off x="731520" y="4190844"/>
-            <a:ext cx="54864" cy="54864"/>
-          </a:xfrm>
-          <a:prstGeom prst="rect">
-            <a:avLst/>
-          </a:prstGeom>
-          <a:solidFill>
-            <a:srgbClr val="BB0000"/>
-          </a:solidFill>
-          <a:ln/>
-        </p:spPr>
-        <p:txBody>
-          <a:bodyPr/>
-          <a:lstStyle/>
-          <a:p>
-            <a:endParaRPr lang="zh-CN" altLang="en-US"/>
+              <a:t>与后端应用 </a:t>
+            </a:r>
+            <a:r>
+              <a:rPr lang="en-US" altLang="zh-CN" sz="1200" dirty="0">
+                <a:solidFill>
+                  <a:srgbClr val="1E293B"/>
+                </a:solidFill>
+                <a:latin typeface="黑体" panose="02010609060101010101" pitchFamily="49" charset="-122"/>
+                <a:ea typeface="黑体" panose="02010609060101010101" pitchFamily="49" charset="-122"/>
+                <a:cs typeface="Arial" pitchFamily="34" charset="-120"/>
+              </a:rPr>
+              <a:t>API</a:t>
+            </a:r>
+            <a:r>
+              <a:rPr lang="zh-CN" altLang="en-US" sz="1200" dirty="0">
+                <a:solidFill>
+                  <a:srgbClr val="1E293B"/>
+                </a:solidFill>
+                <a:latin typeface="黑体" panose="02010609060101010101" pitchFamily="49" charset="-122"/>
+                <a:ea typeface="黑体" panose="02010609060101010101" pitchFamily="49" charset="-122"/>
+                <a:cs typeface="Arial" pitchFamily="34" charset="-120"/>
+              </a:rPr>
+              <a:t>。</a:t>
+            </a:r>
+            <a:endParaRPr lang="en-US" altLang="zh-CN" sz="1200" dirty="0">
+              <a:solidFill>
+                <a:srgbClr val="1E293B"/>
+              </a:solidFill>
+              <a:latin typeface="黑体" panose="02010609060101010101" pitchFamily="49" charset="-122"/>
+              <a:ea typeface="黑体" panose="02010609060101010101" pitchFamily="49" charset="-122"/>
+              <a:cs typeface="Arial" pitchFamily="34" charset="-120"/>
+            </a:endParaRPr>
+          </a:p>
+          <a:p>
+            <a:endParaRPr lang="en-US" altLang="zh-CN" sz="1200" dirty="0">
+              <a:solidFill>
+                <a:srgbClr val="1E293B"/>
+              </a:solidFill>
+              <a:latin typeface="黑体" panose="02010609060101010101" pitchFamily="49" charset="-122"/>
+              <a:ea typeface="黑体" panose="02010609060101010101" pitchFamily="49" charset="-122"/>
+              <a:cs typeface="Arial" pitchFamily="34" charset="-120"/>
+            </a:endParaRPr>
+          </a:p>
+          <a:p>
+            <a:r>
+              <a:rPr lang="en-US" altLang="zh-CN" sz="1200" dirty="0">
+                <a:solidFill>
+                  <a:srgbClr val="1E293B"/>
+                </a:solidFill>
+                <a:latin typeface="黑体" panose="02010609060101010101" pitchFamily="49" charset="-122"/>
+                <a:ea typeface="黑体" panose="02010609060101010101" pitchFamily="49" charset="-122"/>
+                <a:cs typeface="Arial" pitchFamily="34" charset="-120"/>
+              </a:rPr>
+              <a:t>MCP Server </a:t>
+            </a:r>
+            <a:r>
+              <a:rPr lang="zh-CN" altLang="en-US" sz="1200" dirty="0">
+                <a:solidFill>
+                  <a:srgbClr val="1E293B"/>
+                </a:solidFill>
+                <a:latin typeface="黑体" panose="02010609060101010101" pitchFamily="49" charset="-122"/>
+                <a:ea typeface="黑体" panose="02010609060101010101" pitchFamily="49" charset="-122"/>
+                <a:cs typeface="Arial" pitchFamily="34" charset="-120"/>
+              </a:rPr>
+              <a:t>负责 </a:t>
+            </a:r>
+            <a:r>
+              <a:rPr lang="en-US" altLang="zh-CN" sz="1200" dirty="0">
+                <a:solidFill>
+                  <a:srgbClr val="1E293B"/>
+                </a:solidFill>
+                <a:latin typeface="黑体" panose="02010609060101010101" pitchFamily="49" charset="-122"/>
+                <a:ea typeface="黑体" panose="02010609060101010101" pitchFamily="49" charset="-122"/>
+                <a:cs typeface="Arial" pitchFamily="34" charset="-120"/>
+              </a:rPr>
+              <a:t>Agent </a:t>
+            </a:r>
+            <a:r>
+              <a:rPr lang="zh-CN" altLang="en-US" sz="1200" dirty="0">
+                <a:solidFill>
+                  <a:srgbClr val="1E293B"/>
+                </a:solidFill>
+                <a:latin typeface="黑体" panose="02010609060101010101" pitchFamily="49" charset="-122"/>
+                <a:ea typeface="黑体" panose="02010609060101010101" pitchFamily="49" charset="-122"/>
+                <a:cs typeface="Arial" pitchFamily="34" charset="-120"/>
+              </a:rPr>
+              <a:t>侧能力暴露、工具白名单、参数约束和调用审计；</a:t>
+            </a:r>
+            <a:endParaRPr lang="en-US" altLang="zh-CN" sz="1200" dirty="0">
+              <a:solidFill>
+                <a:srgbClr val="1E293B"/>
+              </a:solidFill>
+              <a:latin typeface="黑体" panose="02010609060101010101" pitchFamily="49" charset="-122"/>
+              <a:ea typeface="黑体" panose="02010609060101010101" pitchFamily="49" charset="-122"/>
+              <a:cs typeface="Arial" pitchFamily="34" charset="-120"/>
+            </a:endParaRPr>
+          </a:p>
+          <a:p>
+            <a:endParaRPr lang="en-US" altLang="zh-CN" sz="1200" dirty="0">
+              <a:solidFill>
+                <a:srgbClr val="1E293B"/>
+              </a:solidFill>
+              <a:latin typeface="黑体" panose="02010609060101010101" pitchFamily="49" charset="-122"/>
+              <a:ea typeface="黑体" panose="02010609060101010101" pitchFamily="49" charset="-122"/>
+              <a:cs typeface="Arial" pitchFamily="34" charset="-120"/>
+            </a:endParaRPr>
+          </a:p>
+          <a:p>
+            <a:r>
+              <a:rPr lang="zh-CN" altLang="en-US" sz="1200" dirty="0">
+                <a:solidFill>
+                  <a:srgbClr val="1E293B"/>
+                </a:solidFill>
+                <a:latin typeface="黑体" panose="02010609060101010101" pitchFamily="49" charset="-122"/>
+                <a:ea typeface="黑体" panose="02010609060101010101" pitchFamily="49" charset="-122"/>
+                <a:cs typeface="Arial" pitchFamily="34" charset="-120"/>
+              </a:rPr>
+              <a:t>后端 </a:t>
+            </a:r>
+            <a:r>
+              <a:rPr lang="en-US" altLang="zh-CN" sz="1200" dirty="0">
+                <a:solidFill>
+                  <a:srgbClr val="1E293B"/>
+                </a:solidFill>
+                <a:latin typeface="黑体" panose="02010609060101010101" pitchFamily="49" charset="-122"/>
+                <a:ea typeface="黑体" panose="02010609060101010101" pitchFamily="49" charset="-122"/>
+                <a:cs typeface="Arial" pitchFamily="34" charset="-120"/>
+              </a:rPr>
+              <a:t>API </a:t>
+            </a:r>
+            <a:r>
+              <a:rPr lang="zh-CN" altLang="en-US" sz="1200" dirty="0">
+                <a:solidFill>
+                  <a:srgbClr val="1E293B"/>
+                </a:solidFill>
+                <a:latin typeface="黑体" panose="02010609060101010101" pitchFamily="49" charset="-122"/>
+                <a:ea typeface="黑体" panose="02010609060101010101" pitchFamily="49" charset="-122"/>
+                <a:cs typeface="Arial" pitchFamily="34" charset="-120"/>
+              </a:rPr>
+              <a:t>负责最终权限判定、对象级访问控制、字段级脱敏、条件权限执行和不可绕过的安全审计。</a:t>
+            </a:r>
+            <a:endParaRPr lang="en-US" altLang="zh-CN" sz="1200" dirty="0">
+              <a:solidFill>
+                <a:srgbClr val="1E293B"/>
+              </a:solidFill>
+              <a:latin typeface="黑体" panose="02010609060101010101" pitchFamily="49" charset="-122"/>
+              <a:ea typeface="黑体" panose="02010609060101010101" pitchFamily="49" charset="-122"/>
+              <a:cs typeface="Arial" pitchFamily="34" charset="-120"/>
+            </a:endParaRPr>
+          </a:p>
+          <a:p>
+            <a:endParaRPr lang="en-US" altLang="zh-CN" sz="1200" dirty="0">
+              <a:solidFill>
+                <a:srgbClr val="1E293B"/>
+              </a:solidFill>
+              <a:latin typeface="黑体" panose="02010609060101010101" pitchFamily="49" charset="-122"/>
+              <a:ea typeface="黑体" panose="02010609060101010101" pitchFamily="49" charset="-122"/>
+              <a:cs typeface="Arial" pitchFamily="34" charset="-120"/>
+            </a:endParaRPr>
+          </a:p>
+          <a:p>
+            <a:r>
+              <a:rPr lang="zh-CN" altLang="en-US" sz="1200" dirty="0">
+                <a:solidFill>
+                  <a:srgbClr val="1E293B"/>
+                </a:solidFill>
+                <a:latin typeface="黑体" panose="02010609060101010101" pitchFamily="49" charset="-122"/>
+                <a:ea typeface="黑体" panose="02010609060101010101" pitchFamily="49" charset="-122"/>
+                <a:cs typeface="Arial" pitchFamily="34" charset="-120"/>
+              </a:rPr>
+              <a:t>所有写操作和敏感读操作必须以后端 </a:t>
+            </a:r>
+            <a:r>
+              <a:rPr lang="en-US" altLang="zh-CN" sz="1200" dirty="0">
+                <a:solidFill>
+                  <a:srgbClr val="1E293B"/>
+                </a:solidFill>
+                <a:latin typeface="黑体" panose="02010609060101010101" pitchFamily="49" charset="-122"/>
+                <a:ea typeface="黑体" panose="02010609060101010101" pitchFamily="49" charset="-122"/>
+                <a:cs typeface="Arial" pitchFamily="34" charset="-120"/>
+              </a:rPr>
+              <a:t>API </a:t>
+            </a:r>
+            <a:r>
+              <a:rPr lang="zh-CN" altLang="en-US" sz="1200" dirty="0">
+                <a:solidFill>
+                  <a:srgbClr val="1E293B"/>
+                </a:solidFill>
+                <a:latin typeface="黑体" panose="02010609060101010101" pitchFamily="49" charset="-122"/>
+                <a:ea typeface="黑体" panose="02010609060101010101" pitchFamily="49" charset="-122"/>
+                <a:cs typeface="Arial" pitchFamily="34" charset="-120"/>
+              </a:rPr>
+              <a:t>鉴权结果为准。</a:t>
+            </a:r>
           </a:p>
         </p:txBody>
       </p:sp>
@@ -43653,7 +43299,7 @@
         </p:nvSpPr>
         <p:spPr>
           <a:xfrm>
-            <a:off x="448056" y="4343400"/>
+            <a:off x="502920" y="4251960"/>
             <a:ext cx="4572000" cy="738664"/>
           </a:xfrm>
           <a:prstGeom prst="rect">
@@ -43688,7 +43334,7 @@
             </a:r>
             <a:r>
               <a:rPr lang="zh-CN" altLang="en-US" sz="1050" dirty="0"/>
-              <a:t>擅长跨领域联想与常识推理，不擅长保证推理一致性与可复现性</a:t>
+              <a:t>擅长跨领域联想与常识推理，不能保证推理一致性与可复现性</a:t>
             </a:r>
           </a:p>
           <a:p>
@@ -45949,7 +45595,7 @@
               <a:buNone/>
             </a:pPr>
             <a:r>
-              <a:rPr lang="en-US" sz="1400" b="1" dirty="0">
+              <a:rPr lang="en-US" sz="1400" b="1" dirty="0" err="1">
                 <a:solidFill>
                   <a:srgbClr val="065A82"/>
                 </a:solidFill>
@@ -45957,55 +45603,49 @@
                 <a:ea typeface="Arial" pitchFamily="34" charset="-122"/>
                 <a:cs typeface="Arial" pitchFamily="34" charset="-120"/>
               </a:rPr>
-              <a:t>概念层</a:t>
-            </a:r>
-            <a:endParaRPr lang="en-US" sz="1400" dirty="0"/>
-          </a:p>
-        </p:txBody>
-      </p:sp>
-      <p:sp>
-        <p:nvSpPr>
-          <p:cNvPr id="17" name="Text 15"/>
-          <p:cNvSpPr/>
-          <p:nvPr/>
-        </p:nvSpPr>
-        <p:spPr>
-          <a:xfrm>
-            <a:off x="731520" y="3429000"/>
-            <a:ext cx="2194560" cy="548640"/>
-          </a:xfrm>
-          <a:prstGeom prst="rect">
-            <a:avLst/>
-          </a:prstGeom>
-          <a:noFill/>
-          <a:ln/>
-        </p:spPr>
-        <p:txBody>
-          <a:bodyPr wrap="square" lIns="0" tIns="0" rIns="0" bIns="0" rtlCol="0" anchor="ctr"/>
-          <a:lstStyle/>
-          <a:p>
-            <a:pPr marL="0" indent="0">
-              <a:buNone/>
-            </a:pPr>
-            <a:r>
-              <a:rPr lang="en-US" sz="1200" dirty="0">
-                <a:solidFill>
-                  <a:srgbClr val="64748B"/>
+              <a:t>概念</a:t>
+            </a:r>
+            <a:r>
+              <a:rPr lang="zh-CN" altLang="en-US" sz="1400" b="1" dirty="0">
+                <a:solidFill>
+                  <a:srgbClr val="065A82"/>
                 </a:solidFill>
                 <a:latin typeface="Arial" pitchFamily="34" charset="0"/>
                 <a:ea typeface="Arial" pitchFamily="34" charset="-122"/>
                 <a:cs typeface="Arial" pitchFamily="34" charset="-120"/>
               </a:rPr>
-              <a:t>定义「客户」「订单」「产品」</a:t>
-            </a:r>
-            <a:endParaRPr lang="en-US" sz="1200" dirty="0"/>
-          </a:p>
+              <a:t>与语义</a:t>
+            </a:r>
+            <a:endParaRPr lang="en-US" sz="1400" dirty="0"/>
+          </a:p>
+        </p:txBody>
+      </p:sp>
+      <p:sp>
+        <p:nvSpPr>
+          <p:cNvPr id="17" name="Text 15"/>
+          <p:cNvSpPr/>
+          <p:nvPr/>
+        </p:nvSpPr>
+        <p:spPr>
+          <a:xfrm>
+            <a:off x="731520" y="3429000"/>
+            <a:ext cx="2651760" cy="548640"/>
+          </a:xfrm>
+          <a:prstGeom prst="rect">
+            <a:avLst/>
+          </a:prstGeom>
+          <a:noFill/>
+          <a:ln/>
+        </p:spPr>
+        <p:txBody>
+          <a:bodyPr wrap="square" lIns="0" tIns="0" rIns="0" bIns="0" rtlCol="0" anchor="ctr"/>
+          <a:lstStyle/>
           <a:p>
             <a:pPr marL="0" indent="0">
               <a:buNone/>
             </a:pPr>
             <a:r>
-              <a:rPr lang="en-US" sz="1200" dirty="0">
+              <a:rPr lang="zh-CN" altLang="en-US" sz="900" dirty="0">
                 <a:solidFill>
                   <a:srgbClr val="64748B"/>
                 </a:solidFill>
@@ -46013,9 +45653,141 @@
                 <a:ea typeface="Arial" pitchFamily="34" charset="-122"/>
                 <a:cs typeface="Arial" pitchFamily="34" charset="-120"/>
               </a:rPr>
-              <a:t>及其属性与关系</a:t>
-            </a:r>
-            <a:endParaRPr lang="en-US" sz="1200" dirty="0"/>
+              <a:t>企业已有 </a:t>
+            </a:r>
+            <a:r>
+              <a:rPr lang="en-US" altLang="zh-CN" sz="900" dirty="0">
+                <a:solidFill>
+                  <a:srgbClr val="64748B"/>
+                </a:solidFill>
+                <a:latin typeface="Arial" pitchFamily="34" charset="0"/>
+                <a:ea typeface="Arial" pitchFamily="34" charset="-122"/>
+                <a:cs typeface="Arial" pitchFamily="34" charset="-120"/>
+              </a:rPr>
+              <a:t>ERP</a:t>
+            </a:r>
+            <a:r>
+              <a:rPr lang="zh-CN" altLang="en-US" sz="900" dirty="0">
+                <a:solidFill>
+                  <a:srgbClr val="64748B"/>
+                </a:solidFill>
+                <a:latin typeface="Arial" pitchFamily="34" charset="0"/>
+                <a:ea typeface="Arial" pitchFamily="34" charset="-122"/>
+                <a:cs typeface="Arial" pitchFamily="34" charset="-120"/>
+              </a:rPr>
+              <a:t>、</a:t>
+            </a:r>
+            <a:r>
+              <a:rPr lang="en-US" altLang="zh-CN" sz="900" dirty="0">
+                <a:solidFill>
+                  <a:srgbClr val="64748B"/>
+                </a:solidFill>
+                <a:latin typeface="Arial" pitchFamily="34" charset="0"/>
+                <a:ea typeface="Arial" pitchFamily="34" charset="-122"/>
+                <a:cs typeface="Arial" pitchFamily="34" charset="-120"/>
+              </a:rPr>
+              <a:t>MES</a:t>
+            </a:r>
+            <a:r>
+              <a:rPr lang="zh-CN" altLang="en-US" sz="900" dirty="0">
+                <a:solidFill>
+                  <a:srgbClr val="64748B"/>
+                </a:solidFill>
+                <a:latin typeface="Arial" pitchFamily="34" charset="0"/>
+                <a:ea typeface="Arial" pitchFamily="34" charset="-122"/>
+                <a:cs typeface="Arial" pitchFamily="34" charset="-120"/>
+              </a:rPr>
+              <a:t>、</a:t>
+            </a:r>
+            <a:r>
+              <a:rPr lang="en-US" altLang="zh-CN" sz="900" dirty="0">
+                <a:solidFill>
+                  <a:srgbClr val="64748B"/>
+                </a:solidFill>
+                <a:latin typeface="Arial" pitchFamily="34" charset="0"/>
+                <a:ea typeface="Arial" pitchFamily="34" charset="-122"/>
+                <a:cs typeface="Arial" pitchFamily="34" charset="-120"/>
+              </a:rPr>
+              <a:t>WMS</a:t>
+            </a:r>
+            <a:r>
+              <a:rPr lang="zh-CN" altLang="en-US" sz="900" dirty="0">
+                <a:solidFill>
+                  <a:srgbClr val="64748B"/>
+                </a:solidFill>
+                <a:latin typeface="Arial" pitchFamily="34" charset="0"/>
+                <a:ea typeface="Arial" pitchFamily="34" charset="-122"/>
+                <a:cs typeface="Arial" pitchFamily="34" charset="-120"/>
+              </a:rPr>
+              <a:t>、</a:t>
+            </a:r>
+            <a:r>
+              <a:rPr lang="en-US" altLang="zh-CN" sz="900" dirty="0">
+                <a:solidFill>
+                  <a:srgbClr val="64748B"/>
+                </a:solidFill>
+                <a:latin typeface="Arial" pitchFamily="34" charset="0"/>
+                <a:ea typeface="Arial" pitchFamily="34" charset="-122"/>
+                <a:cs typeface="Arial" pitchFamily="34" charset="-120"/>
+              </a:rPr>
+              <a:t>QMS</a:t>
+            </a:r>
+            <a:r>
+              <a:rPr lang="zh-CN" altLang="en-US" sz="900" dirty="0">
+                <a:solidFill>
+                  <a:srgbClr val="64748B"/>
+                </a:solidFill>
+                <a:latin typeface="Arial" pitchFamily="34" charset="0"/>
+                <a:ea typeface="Arial" pitchFamily="34" charset="-122"/>
+                <a:cs typeface="Arial" pitchFamily="34" charset="-120"/>
+              </a:rPr>
+              <a:t>、</a:t>
+            </a:r>
+            <a:r>
+              <a:rPr lang="en-US" altLang="zh-CN" sz="900" dirty="0">
+                <a:solidFill>
+                  <a:srgbClr val="64748B"/>
+                </a:solidFill>
+                <a:latin typeface="Arial" pitchFamily="34" charset="0"/>
+                <a:ea typeface="Arial" pitchFamily="34" charset="-122"/>
+                <a:cs typeface="Arial" pitchFamily="34" charset="-120"/>
+              </a:rPr>
+              <a:t>CRM </a:t>
+            </a:r>
+            <a:r>
+              <a:rPr lang="zh-CN" altLang="en-US" sz="900" dirty="0">
+                <a:solidFill>
+                  <a:srgbClr val="64748B"/>
+                </a:solidFill>
+                <a:latin typeface="Arial" pitchFamily="34" charset="0"/>
+                <a:ea typeface="Arial" pitchFamily="34" charset="-122"/>
+                <a:cs typeface="Arial" pitchFamily="34" charset="-120"/>
+              </a:rPr>
+              <a:t>等系统，但这些系统中的业务含义通常隐藏在字段、枚举、流程和人员经验里。</a:t>
+            </a:r>
+            <a:r>
+              <a:rPr lang="en-US" altLang="zh-CN" sz="900" dirty="0">
+                <a:solidFill>
+                  <a:srgbClr val="64748B"/>
+                </a:solidFill>
+                <a:latin typeface="Arial" pitchFamily="34" charset="0"/>
+                <a:ea typeface="Arial" pitchFamily="34" charset="-122"/>
+                <a:cs typeface="Arial" pitchFamily="34" charset="-120"/>
+              </a:rPr>
+              <a:t>LLM </a:t>
+            </a:r>
+            <a:r>
+              <a:rPr lang="zh-CN" altLang="en-US" sz="900" dirty="0">
+                <a:solidFill>
+                  <a:srgbClr val="64748B"/>
+                </a:solidFill>
+                <a:latin typeface="Arial" pitchFamily="34" charset="0"/>
+                <a:ea typeface="Arial" pitchFamily="34" charset="-122"/>
+                <a:cs typeface="Arial" pitchFamily="34" charset="-120"/>
+              </a:rPr>
+              <a:t>可以理解自然语言，却不知道企业内部“生产订单下达”“物料齐套”“技术关闭”“准时完工率”等概念的准确含义、规则边界和数据来源。</a:t>
+            </a:r>
+            <a:endParaRPr lang="en-US" sz="900" dirty="0"/>
           </a:p>
         </p:txBody>
       </p:sp>
@@ -46171,7 +45943,7 @@
               <a:buNone/>
             </a:pPr>
             <a:r>
-              <a:rPr lang="en-US" sz="1400" b="1" dirty="0">
+              <a:rPr lang="zh-CN" altLang="en-US" sz="1400" b="1" dirty="0">
                 <a:solidFill>
                   <a:srgbClr val="E78C07"/>
                 </a:solidFill>
@@ -46179,65 +45951,20 @@
                 <a:ea typeface="Arial" pitchFamily="34" charset="-122"/>
                 <a:cs typeface="Arial" pitchFamily="34" charset="-120"/>
               </a:rPr>
-              <a:t>约束层</a:t>
-            </a:r>
-            <a:endParaRPr lang="en-US" sz="1400" dirty="0"/>
-          </a:p>
-        </p:txBody>
-      </p:sp>
-      <p:sp>
-        <p:nvSpPr>
-          <p:cNvPr id="23" name="Text 21"/>
-          <p:cNvSpPr/>
-          <p:nvPr/>
-        </p:nvSpPr>
-        <p:spPr>
-          <a:xfrm>
-            <a:off x="3566160" y="3429000"/>
-            <a:ext cx="2194560" cy="548640"/>
-          </a:xfrm>
-          <a:prstGeom prst="rect">
-            <a:avLst/>
-          </a:prstGeom>
-          <a:noFill/>
-          <a:ln/>
-        </p:spPr>
-        <p:txBody>
-          <a:bodyPr wrap="square" lIns="0" tIns="0" rIns="0" bIns="0" rtlCol="0" anchor="ctr"/>
-          <a:lstStyle/>
-          <a:p>
-            <a:pPr marL="0" indent="0">
-              <a:buNone/>
-            </a:pPr>
-            <a:r>
-              <a:rPr lang="en-US" sz="1200" dirty="0">
-                <a:solidFill>
-                  <a:srgbClr val="64748B"/>
+              <a:t>行为与</a:t>
+            </a:r>
+            <a:r>
+              <a:rPr lang="en-US" sz="1400" b="1" dirty="0" err="1">
+                <a:solidFill>
+                  <a:srgbClr val="E78C07"/>
                 </a:solidFill>
                 <a:latin typeface="Arial" pitchFamily="34" charset="0"/>
                 <a:ea typeface="Arial" pitchFamily="34" charset="-122"/>
                 <a:cs typeface="Arial" pitchFamily="34" charset="-120"/>
               </a:rPr>
-              <a:t>定义「下单前必须校验库存」</a:t>
-            </a:r>
-            <a:endParaRPr lang="en-US" sz="1200" dirty="0"/>
-          </a:p>
-          <a:p>
-            <a:pPr marL="0" indent="0">
-              <a:buNone/>
-            </a:pPr>
-            <a:r>
-              <a:rPr lang="en-US" sz="1200" dirty="0">
-                <a:solidFill>
-                  <a:srgbClr val="64748B"/>
-                </a:solidFill>
-                <a:latin typeface="Arial" pitchFamily="34" charset="0"/>
-                <a:ea typeface="Arial" pitchFamily="34" charset="-122"/>
-                <a:cs typeface="Arial" pitchFamily="34" charset="-120"/>
-              </a:rPr>
-              <a:t>「已发货订单不可取消」</a:t>
-            </a:r>
-            <a:endParaRPr lang="en-US" sz="1200" dirty="0"/>
+              <a:t>约束</a:t>
+            </a:r>
+            <a:endParaRPr lang="en-US" sz="1400" dirty="0"/>
           </a:p>
         </p:txBody>
       </p:sp>
@@ -46271,7 +45998,7 @@
           <a:bodyPr/>
           <a:lstStyle/>
           <a:p>
-            <a:endParaRPr lang="zh-CN" altLang="en-US"/>
+            <a:endParaRPr lang="zh-CN" altLang="en-US" dirty="0"/>
           </a:p>
         </p:txBody>
       </p:sp>
@@ -46393,7 +46120,7 @@
               <a:buNone/>
             </a:pPr>
             <a:r>
-              <a:rPr lang="en-US" sz="1400" b="1" dirty="0">
+              <a:rPr lang="zh-CN" altLang="en-US" sz="1400" b="1" dirty="0">
                 <a:solidFill>
                   <a:srgbClr val="22A699"/>
                 </a:solidFill>
@@ -46401,7 +46128,7 @@
                 <a:ea typeface="Arial" pitchFamily="34" charset="-122"/>
                 <a:cs typeface="Arial" pitchFamily="34" charset="-120"/>
               </a:rPr>
-              <a:t>执行层</a:t>
+              <a:t>事件</a:t>
             </a:r>
             <a:endParaRPr lang="en-US" sz="1400" dirty="0"/>
           </a:p>
@@ -46415,8 +46142,8 @@
         </p:nvSpPr>
         <p:spPr>
           <a:xfrm>
-            <a:off x="6400800" y="3429000"/>
-            <a:ext cx="2194560" cy="548640"/>
+            <a:off x="3593592" y="3446469"/>
+            <a:ext cx="2496312" cy="548640"/>
           </a:xfrm>
           <a:prstGeom prst="rect">
             <a:avLst/>
@@ -46432,34 +46159,142 @@
               <a:buNone/>
             </a:pPr>
             <a:r>
-              <a:rPr lang="en-US" sz="1200" dirty="0">
+              <a:rPr lang="zh-CN" altLang="en-US" sz="900" dirty="0">
                 <a:solidFill>
                   <a:srgbClr val="64748B"/>
                 </a:solidFill>
-                <a:latin typeface="Arial" pitchFamily="34" charset="0"/>
+                <a:latin typeface="Arial" panose="020B0604020202020204" pitchFamily="34" charset="0"/>
                 <a:ea typeface="Arial" pitchFamily="34" charset="-122"/>
-                <a:cs typeface="Arial" pitchFamily="34" charset="-120"/>
-              </a:rPr>
-              <a:t>定义「谁可以做什么操作」</a:t>
-            </a:r>
-            <a:endParaRPr lang="en-US" sz="1200" dirty="0"/>
-          </a:p>
-          <a:p>
-            <a:pPr marL="0" indent="0">
-              <a:buNone/>
-            </a:pPr>
-            <a:r>
-              <a:rPr lang="en-US" sz="1200" dirty="0">
+                <a:cs typeface="Arial" panose="020B0604020202020204" pitchFamily="34" charset="0"/>
+              </a:rPr>
+              <a:t>行为</a:t>
+            </a:r>
+            <a:r>
+              <a:rPr lang="en-US" sz="900" dirty="0" err="1">
                 <a:solidFill>
                   <a:srgbClr val="64748B"/>
                 </a:solidFill>
-                <a:latin typeface="Arial" pitchFamily="34" charset="0"/>
+                <a:latin typeface="Arial" panose="020B0604020202020204" pitchFamily="34" charset="0"/>
                 <a:ea typeface="Arial" pitchFamily="34" charset="-122"/>
-                <a:cs typeface="Arial" pitchFamily="34" charset="-120"/>
-              </a:rPr>
-              <a:t>「操作后触发什么事件」</a:t>
-            </a:r>
-            <a:endParaRPr lang="en-US" sz="1200" dirty="0"/>
+                <a:cs typeface="Arial" panose="020B0604020202020204" pitchFamily="34" charset="0"/>
+              </a:rPr>
+              <a:t>定义「谁可以做什么操作</a:t>
+            </a:r>
+            <a:r>
+              <a:rPr lang="en-US" sz="900" dirty="0">
+                <a:solidFill>
+                  <a:srgbClr val="64748B"/>
+                </a:solidFill>
+                <a:latin typeface="Arial" panose="020B0604020202020204" pitchFamily="34" charset="0"/>
+                <a:ea typeface="Arial" pitchFamily="34" charset="-122"/>
+                <a:cs typeface="Arial" panose="020B0604020202020204" pitchFamily="34" charset="0"/>
+              </a:rPr>
+              <a:t>」</a:t>
+            </a:r>
+            <a:r>
+              <a:rPr lang="zh-CN" altLang="en-US" sz="900" dirty="0">
+                <a:solidFill>
+                  <a:srgbClr val="64748B"/>
+                </a:solidFill>
+                <a:latin typeface="Arial" panose="020B0604020202020204" pitchFamily="34" charset="0"/>
+                <a:ea typeface="Arial" pitchFamily="34" charset="-122"/>
+                <a:cs typeface="Arial" panose="020B0604020202020204" pitchFamily="34" charset="0"/>
+              </a:rPr>
+              <a:t>业务能做什么，包括业务动作、前置校验、行为边界、执行权限。</a:t>
+            </a:r>
+            <a:endParaRPr lang="en-US" altLang="zh-CN" sz="900" dirty="0">
+              <a:solidFill>
+                <a:srgbClr val="64748B"/>
+              </a:solidFill>
+              <a:latin typeface="Arial" panose="020B0604020202020204" pitchFamily="34" charset="0"/>
+              <a:ea typeface="Arial" pitchFamily="34" charset="-122"/>
+              <a:cs typeface="Arial" panose="020B0604020202020204" pitchFamily="34" charset="0"/>
+            </a:endParaRPr>
+          </a:p>
+          <a:p>
+            <a:r>
+              <a:rPr lang="zh-CN" altLang="en-US" sz="900" dirty="0">
+                <a:solidFill>
+                  <a:srgbClr val="64748B"/>
+                </a:solidFill>
+                <a:latin typeface="Arial" panose="020B0604020202020204" pitchFamily="34" charset="0"/>
+                <a:ea typeface="Arial" pitchFamily="34" charset="-122"/>
+                <a:cs typeface="Arial" panose="020B0604020202020204" pitchFamily="34" charset="0"/>
+              </a:rPr>
+              <a:t>指标定义：指标公式、数据来源和维度分散</a:t>
+            </a:r>
+            <a:endParaRPr lang="en-US" altLang="zh-CN" sz="900" dirty="0">
+              <a:solidFill>
+                <a:srgbClr val="64748B"/>
+              </a:solidFill>
+              <a:latin typeface="Arial" panose="020B0604020202020204" pitchFamily="34" charset="0"/>
+              <a:ea typeface="Arial" pitchFamily="34" charset="-122"/>
+              <a:cs typeface="Arial" panose="020B0604020202020204" pitchFamily="34" charset="0"/>
+            </a:endParaRPr>
+          </a:p>
+          <a:p>
+            <a:r>
+              <a:rPr lang="zh-CN" altLang="en-US" sz="900" dirty="0">
+                <a:solidFill>
+                  <a:srgbClr val="64748B"/>
+                </a:solidFill>
+                <a:latin typeface="Arial" panose="020B0604020202020204" pitchFamily="34" charset="0"/>
+                <a:cs typeface="Arial" panose="020B0604020202020204" pitchFamily="34" charset="0"/>
+              </a:rPr>
+              <a:t>规则与约束：</a:t>
+            </a:r>
+            <a:r>
+              <a:rPr lang="en-US" altLang="zh-CN" sz="900" dirty="0" err="1">
+                <a:solidFill>
+                  <a:srgbClr val="64748B"/>
+                </a:solidFill>
+                <a:latin typeface="Arial" panose="020B0604020202020204" pitchFamily="34" charset="0"/>
+                <a:cs typeface="Arial" panose="020B0604020202020204" pitchFamily="34" charset="0"/>
+              </a:rPr>
+              <a:t>定义「下单前必须校验库存</a:t>
+            </a:r>
+            <a:r>
+              <a:rPr lang="en-US" altLang="zh-CN" sz="900" dirty="0">
+                <a:solidFill>
+                  <a:srgbClr val="64748B"/>
+                </a:solidFill>
+                <a:latin typeface="Arial" panose="020B0604020202020204" pitchFamily="34" charset="0"/>
+                <a:cs typeface="Arial" panose="020B0604020202020204" pitchFamily="34" charset="0"/>
+              </a:rPr>
+              <a:t>」</a:t>
+            </a:r>
+          </a:p>
+          <a:p>
+            <a:r>
+              <a:rPr lang="en-US" altLang="zh-CN" sz="900" dirty="0">
+                <a:solidFill>
+                  <a:srgbClr val="64748B"/>
+                </a:solidFill>
+                <a:latin typeface="Arial" panose="020B0604020202020204" pitchFamily="34" charset="0"/>
+                <a:cs typeface="Arial" panose="020B0604020202020204" pitchFamily="34" charset="0"/>
+              </a:rPr>
+              <a:t>「</a:t>
+            </a:r>
+            <a:r>
+              <a:rPr lang="en-US" altLang="zh-CN" sz="900" dirty="0" err="1">
+                <a:solidFill>
+                  <a:srgbClr val="64748B"/>
+                </a:solidFill>
+                <a:latin typeface="Arial" panose="020B0604020202020204" pitchFamily="34" charset="0"/>
+                <a:cs typeface="Arial" panose="020B0604020202020204" pitchFamily="34" charset="0"/>
+              </a:rPr>
+              <a:t>已发货订单不可取消</a:t>
+            </a:r>
+            <a:r>
+              <a:rPr lang="en-US" altLang="zh-CN" sz="900" dirty="0">
+                <a:solidFill>
+                  <a:srgbClr val="64748B"/>
+                </a:solidFill>
+                <a:latin typeface="Arial" panose="020B0604020202020204" pitchFamily="34" charset="0"/>
+                <a:cs typeface="Arial" panose="020B0604020202020204" pitchFamily="34" charset="0"/>
+              </a:rPr>
+              <a:t>」</a:t>
+            </a:r>
           </a:p>
         </p:txBody>
       </p:sp>
@@ -46498,8 +46333,8 @@
         </p:nvSpPr>
         <p:spPr>
           <a:xfrm>
-            <a:off x="665533" y="4220233"/>
-            <a:ext cx="7680960" cy="800219"/>
+            <a:off x="665533" y="4266399"/>
+            <a:ext cx="7680960" cy="707886"/>
           </a:xfrm>
           <a:prstGeom prst="rect">
             <a:avLst/>
@@ -46527,7 +46362,7 @@
               </a:defRPr>
             </a:pPr>
             <a:r>
-              <a:rPr lang="zh-CN" altLang="en-US" sz="1050" dirty="0">
+              <a:rPr lang="zh-CN" altLang="en-US" sz="900" dirty="0">
                 <a:solidFill>
                   <a:srgbClr val="64748B"/>
                 </a:solidFill>
@@ -46551,7 +46386,7 @@
               </a:defRPr>
             </a:pPr>
             <a:r>
-              <a:rPr lang="zh-CN" altLang="en-US" sz="1050" dirty="0">
+              <a:rPr lang="zh-CN" altLang="en-US" sz="900" dirty="0">
                 <a:solidFill>
                   <a:srgbClr val="64748B"/>
                 </a:solidFill>
@@ -46575,7 +46410,7 @@
               </a:defRPr>
             </a:pPr>
             <a:r>
-              <a:rPr lang="zh-CN" altLang="en-US" sz="1050" dirty="0">
+              <a:rPr lang="zh-CN" altLang="en-US" sz="900" dirty="0">
                 <a:solidFill>
                   <a:srgbClr val="64748B"/>
                 </a:solidFill>
@@ -46599,7 +46434,7 @@
               </a:defRPr>
             </a:pPr>
             <a:r>
-              <a:rPr lang="zh-CN" altLang="en-US" sz="1050" dirty="0">
+              <a:rPr lang="zh-CN" altLang="en-US" sz="900" dirty="0">
                 <a:solidFill>
                   <a:srgbClr val="64748B"/>
                 </a:solidFill>
@@ -46607,7 +46442,67 @@
               </a:rPr>
               <a:t>可解释性：提供推理路径追溯，满足审计合规要求</a:t>
             </a:r>
-            <a:endParaRPr lang="en-US" sz="1200" dirty="0"/>
+            <a:endParaRPr lang="en-US" sz="1050" dirty="0"/>
+          </a:p>
+        </p:txBody>
+      </p:sp>
+      <p:sp>
+        <p:nvSpPr>
+          <p:cNvPr id="33" name="文本框 32">
+            <a:extLst>
+              <a:ext uri="{FF2B5EF4-FFF2-40B4-BE49-F238E27FC236}">
+                <a16:creationId xmlns:a16="http://schemas.microsoft.com/office/drawing/2014/main" id="{D5E75B27-27E6-3937-547C-0C693709B76C}"/>
+              </a:ext>
+            </a:extLst>
+          </p:cNvPr>
+          <p:cNvSpPr txBox="1"/>
+          <p:nvPr/>
+        </p:nvSpPr>
+        <p:spPr>
+          <a:xfrm>
+            <a:off x="6245352" y="3386734"/>
+            <a:ext cx="2258568" cy="507831"/>
+          </a:xfrm>
+          <a:prstGeom prst="rect">
+            <a:avLst/>
+          </a:prstGeom>
+          <a:noFill/>
+        </p:spPr>
+        <p:txBody>
+          <a:bodyPr wrap="square">
+            <a:spAutoFit/>
+          </a:bodyPr>
+          <a:lstStyle/>
+          <a:p>
+            <a:r>
+              <a:rPr lang="zh-CN" altLang="en-US" sz="900" dirty="0">
+                <a:solidFill>
+                  <a:srgbClr val="64748B"/>
+                </a:solidFill>
+                <a:latin typeface="Arial" panose="020B0604020202020204" pitchFamily="34" charset="0"/>
+                <a:cs typeface="Arial" panose="020B0604020202020204" pitchFamily="34" charset="0"/>
+              </a:rPr>
+              <a:t>「操作后触发什么事件」</a:t>
+            </a:r>
+            <a:endParaRPr lang="en-US" altLang="zh-CN" sz="900" dirty="0">
+              <a:solidFill>
+                <a:srgbClr val="64748B"/>
+              </a:solidFill>
+              <a:latin typeface="Arial" panose="020B0604020202020204" pitchFamily="34" charset="0"/>
+              <a:cs typeface="Arial" panose="020B0604020202020204" pitchFamily="34" charset="0"/>
+            </a:endParaRPr>
+          </a:p>
+          <a:p>
+            <a:r>
+              <a:rPr lang="zh-CN" altLang="en-US" sz="900" dirty="0">
+                <a:solidFill>
+                  <a:srgbClr val="64748B"/>
+                </a:solidFill>
+                <a:latin typeface="Arial" panose="020B0604020202020204" pitchFamily="34" charset="0"/>
+                <a:cs typeface="Arial" panose="020B0604020202020204" pitchFamily="34" charset="0"/>
+              </a:rPr>
+              <a:t>行为完成后，往往缺少标准事件记录和推导链，导致结果难审计，经验难沉淀</a:t>
+            </a:r>
           </a:p>
         </p:txBody>
       </p:sp>
@@ -49197,6 +49092,31 @@
           <a:bodyPr rtlCol="0" anchor="ctr"/>
           <a:lstStyle/>
           <a:p>
+            <a:pPr algn="ctr">
+              <a:defRPr/>
+            </a:pPr>
+            <a:r>
+              <a:rPr kumimoji="1" lang="zh-CN" altLang="en-US" sz="1000" kern="0" dirty="0">
+                <a:solidFill>
+                  <a:srgbClr val="4472C4"/>
+                </a:solidFill>
+                <a:latin typeface="Microsoft YaHei" panose="020B0503020204020204" pitchFamily="34" charset="-122"/>
+                <a:ea typeface="Microsoft YaHei" panose="020B0503020204020204" pitchFamily="34" charset="-122"/>
+              </a:rPr>
+              <a:t>调用本地</a:t>
+            </a:r>
+            <a:r>
+              <a:rPr kumimoji="1" lang="en-US" altLang="zh-CN" sz="1000" kern="0" dirty="0">
+                <a:solidFill>
+                  <a:srgbClr val="4472C4"/>
+                </a:solidFill>
+                <a:latin typeface="Microsoft YaHei" panose="020B0503020204020204" pitchFamily="34" charset="-122"/>
+                <a:ea typeface="Microsoft YaHei" panose="020B0503020204020204" pitchFamily="34" charset="-122"/>
+              </a:rPr>
+              <a:t>MCP</a:t>
+            </a:r>
+          </a:p>
+          <a:p>
             <a:pPr marL="0" marR="0" lvl="0" indent="0" algn="ctr" defTabSz="914400" eaLnBrk="1" fontAlgn="auto" latinLnBrk="0" hangingPunct="1">
               <a:lnSpc>
                 <a:spcPct val="100000"/>
@@ -49243,22 +49163,648 @@
           </a:p>
         </p:txBody>
       </p:sp>
-      <p:sp>
-        <p:nvSpPr>
-          <p:cNvPr id="29" name="矩形: 圆角 28">
+      <p:cxnSp>
+        <p:nvCxnSpPr>
+          <p:cNvPr id="32" name="连接符: 肘形 31">
             <a:extLst>
               <a:ext uri="{FF2B5EF4-FFF2-40B4-BE49-F238E27FC236}">
-                <a16:creationId xmlns:a16="http://schemas.microsoft.com/office/drawing/2014/main" id="{C0926C76-AA71-43BC-2318-DDB1BA342357}"/>
+                <a16:creationId xmlns:a16="http://schemas.microsoft.com/office/drawing/2014/main" id="{411F6272-2E3A-1B6B-B5DE-A2E736113581}"/>
               </a:ext>
             </a:extLst>
           </p:cNvPr>
-          <p:cNvSpPr/>
-          <p:nvPr/>
-        </p:nvSpPr>
-        <p:spPr>
-          <a:xfrm>
-            <a:off x="3247704" y="4081087"/>
-            <a:ext cx="1461027" cy="256652"/>
+          <p:cNvCxnSpPr>
+            <a:cxnSpLocks/>
+            <a:stCxn id="10" idx="3"/>
+            <a:endCxn id="2" idx="1"/>
+          </p:cNvCxnSpPr>
+          <p:nvPr/>
+        </p:nvCxnSpPr>
+        <p:spPr>
+          <a:xfrm>
+            <a:off x="2641925" y="4011758"/>
+            <a:ext cx="605779" cy="34689"/>
+          </a:xfrm>
+          <a:prstGeom prst="bentConnector3">
+            <a:avLst/>
+          </a:prstGeom>
+          <a:noFill/>
+          <a:ln w="6350" cap="flat" cmpd="sng" algn="ctr">
+            <a:solidFill>
+              <a:srgbClr val="35C3F7"/>
+            </a:solidFill>
+            <a:prstDash val="solid"/>
+            <a:miter lim="800000"/>
+            <a:tailEnd type="triangle"/>
+          </a:ln>
+          <a:effectLst/>
+        </p:spPr>
+      </p:cxnSp>
+      <p:cxnSp>
+        <p:nvCxnSpPr>
+          <p:cNvPr id="33" name="连接符: 肘形 32">
+            <a:extLst>
+              <a:ext uri="{FF2B5EF4-FFF2-40B4-BE49-F238E27FC236}">
+                <a16:creationId xmlns:a16="http://schemas.microsoft.com/office/drawing/2014/main" id="{93DEB8E6-8F50-239C-D709-5E8EC6046127}"/>
+              </a:ext>
+            </a:extLst>
+          </p:cNvPr>
+          <p:cNvCxnSpPr>
+            <a:cxnSpLocks/>
+            <a:stCxn id="10" idx="3"/>
+            <a:endCxn id="4" idx="1"/>
+          </p:cNvCxnSpPr>
+          <p:nvPr/>
+        </p:nvCxnSpPr>
+        <p:spPr>
+          <a:xfrm>
+            <a:off x="2641925" y="4011758"/>
+            <a:ext cx="605779" cy="635467"/>
+          </a:xfrm>
+          <a:prstGeom prst="bentConnector3">
+            <a:avLst/>
+          </a:prstGeom>
+          <a:noFill/>
+          <a:ln w="6350" cap="flat" cmpd="sng" algn="ctr">
+            <a:solidFill>
+              <a:srgbClr val="35C3F7"/>
+            </a:solidFill>
+            <a:prstDash val="solid"/>
+            <a:miter lim="800000"/>
+            <a:tailEnd type="triangle"/>
+          </a:ln>
+          <a:effectLst/>
+        </p:spPr>
+      </p:cxnSp>
+      <p:cxnSp>
+        <p:nvCxnSpPr>
+          <p:cNvPr id="34" name="直线箭头连接符 34">
+            <a:extLst>
+              <a:ext uri="{FF2B5EF4-FFF2-40B4-BE49-F238E27FC236}">
+                <a16:creationId xmlns:a16="http://schemas.microsoft.com/office/drawing/2014/main" id="{474092B0-E2AC-9CC9-5B40-7F422E37FF66}"/>
+              </a:ext>
+            </a:extLst>
+          </p:cNvPr>
+          <p:cNvCxnSpPr>
+            <a:cxnSpLocks/>
+            <a:stCxn id="10" idx="2"/>
+            <a:endCxn id="12" idx="0"/>
+          </p:cNvCxnSpPr>
+          <p:nvPr/>
+        </p:nvCxnSpPr>
+        <p:spPr>
+          <a:xfrm>
+            <a:off x="1503842" y="4257676"/>
+            <a:ext cx="0" cy="290422"/>
+          </a:xfrm>
+          <a:prstGeom prst="straightConnector1">
+            <a:avLst/>
+          </a:prstGeom>
+          <a:noFill/>
+          <a:ln w="10795" cap="flat" cmpd="sng" algn="ctr">
+            <a:solidFill>
+              <a:srgbClr val="35C3F7"/>
+            </a:solidFill>
+            <a:prstDash val="solid"/>
+            <a:tailEnd type="triangle"/>
+          </a:ln>
+          <a:effectLst/>
+        </p:spPr>
+      </p:cxnSp>
+      <p:sp>
+        <p:nvSpPr>
+          <p:cNvPr id="38" name="矩形: 圆角 37">
+            <a:extLst>
+              <a:ext uri="{FF2B5EF4-FFF2-40B4-BE49-F238E27FC236}">
+                <a16:creationId xmlns:a16="http://schemas.microsoft.com/office/drawing/2014/main" id="{21928885-8F3B-DEF9-5A43-D2285E987173}"/>
+              </a:ext>
+            </a:extLst>
+          </p:cNvPr>
+          <p:cNvSpPr/>
+          <p:nvPr/>
+        </p:nvSpPr>
+        <p:spPr>
+          <a:xfrm>
+            <a:off x="3247704" y="3053612"/>
+            <a:ext cx="1461027" cy="351559"/>
+          </a:xfrm>
+          <a:prstGeom prst="roundRect">
+            <a:avLst/>
+          </a:prstGeom>
+          <a:noFill/>
+          <a:ln w="6350" cap="sq" cmpd="sng" algn="ctr">
+            <a:solidFill>
+              <a:srgbClr val="29484D"/>
+            </a:solidFill>
+            <a:prstDash val="solid"/>
+            <a:miter lim="800000"/>
+          </a:ln>
+          <a:effectLst/>
+        </p:spPr>
+        <p:txBody>
+          <a:bodyPr rot="0" spcFirstLastPara="0" vertOverflow="overflow" horzOverflow="overflow" vert="horz" wrap="square" lIns="0" tIns="45720" rIns="0" bIns="45720" numCol="1" spcCol="0" rtlCol="0" fromWordArt="0" anchor="ctr" anchorCtr="0" forceAA="0" compatLnSpc="1">
+            <a:prstTxWarp prst="textNoShape">
+              <a:avLst/>
+            </a:prstTxWarp>
+            <a:noAutofit/>
+          </a:bodyPr>
+          <a:lstStyle/>
+          <a:p>
+            <a:pPr marL="0" marR="0" lvl="0" indent="0" algn="ctr" defTabSz="914400" eaLnBrk="1" fontAlgn="auto" latinLnBrk="0" hangingPunct="1">
+              <a:lnSpc>
+                <a:spcPct val="100000"/>
+              </a:lnSpc>
+              <a:spcBef>
+                <a:spcPts val="0"/>
+              </a:spcBef>
+              <a:spcAft>
+                <a:spcPts val="0"/>
+              </a:spcAft>
+              <a:buClrTx/>
+              <a:buSzTx/>
+              <a:buFontTx/>
+              <a:buNone/>
+              <a:tabLst/>
+              <a:defRPr/>
+            </a:pPr>
+            <a:r>
+              <a:rPr kumimoji="0" lang="zh-CN" altLang="en-US" sz="800" b="0" i="0" u="none" strike="noStrike" kern="0" cap="none" spc="0" normalizeH="0" baseline="0" noProof="0" dirty="0">
+                <a:ln>
+                  <a:noFill/>
+                </a:ln>
+                <a:solidFill>
+                  <a:srgbClr val="000000"/>
+                </a:solidFill>
+                <a:effectLst/>
+                <a:uLnTx/>
+                <a:uFillTx/>
+                <a:latin typeface="华文楷体"/>
+                <a:ea typeface="华文楷体"/>
+                <a:cs typeface="+mn-cs"/>
+              </a:rPr>
+              <a:t>本体模型（专业外脑）</a:t>
+            </a:r>
+            <a:endParaRPr kumimoji="0" lang="en-US" altLang="zh-CN" sz="800" b="0" i="0" u="none" strike="noStrike" kern="0" cap="none" spc="0" normalizeH="0" baseline="0" noProof="0" dirty="0">
+              <a:ln>
+                <a:noFill/>
+              </a:ln>
+              <a:solidFill>
+                <a:srgbClr val="000000"/>
+              </a:solidFill>
+              <a:effectLst/>
+              <a:uLnTx/>
+              <a:uFillTx/>
+              <a:latin typeface="华文楷体"/>
+              <a:ea typeface="华文楷体"/>
+              <a:cs typeface="+mn-cs"/>
+            </a:endParaRPr>
+          </a:p>
+          <a:p>
+            <a:pPr marL="0" marR="0" lvl="0" indent="0" algn="ctr" defTabSz="914400" eaLnBrk="1" fontAlgn="auto" latinLnBrk="0" hangingPunct="1">
+              <a:lnSpc>
+                <a:spcPct val="100000"/>
+              </a:lnSpc>
+              <a:spcBef>
+                <a:spcPts val="0"/>
+              </a:spcBef>
+              <a:spcAft>
+                <a:spcPts val="0"/>
+              </a:spcAft>
+              <a:buClrTx/>
+              <a:buSzTx/>
+              <a:buFontTx/>
+              <a:buNone/>
+              <a:tabLst/>
+              <a:defRPr/>
+            </a:pPr>
+            <a:r>
+              <a:rPr kumimoji="0" lang="zh-CN" altLang="en-US" sz="800" b="0" i="0" u="none" strike="noStrike" kern="0" cap="none" spc="0" normalizeH="0" baseline="0" noProof="0" dirty="0">
+                <a:ln>
+                  <a:noFill/>
+                </a:ln>
+                <a:solidFill>
+                  <a:srgbClr val="000000"/>
+                </a:solidFill>
+                <a:effectLst/>
+                <a:uLnTx/>
+                <a:uFillTx/>
+                <a:latin typeface="华文楷体"/>
+                <a:ea typeface="华文楷体"/>
+                <a:cs typeface="+mn-cs"/>
+              </a:rPr>
+              <a:t>获取本体定义的合法操作</a:t>
+            </a:r>
+          </a:p>
+        </p:txBody>
+      </p:sp>
+      <p:cxnSp>
+        <p:nvCxnSpPr>
+          <p:cNvPr id="41" name="直线箭头连接符 34">
+            <a:extLst>
+              <a:ext uri="{FF2B5EF4-FFF2-40B4-BE49-F238E27FC236}">
+                <a16:creationId xmlns:a16="http://schemas.microsoft.com/office/drawing/2014/main" id="{B8332B02-0989-802E-B9C9-664F8EB2C313}"/>
+              </a:ext>
+            </a:extLst>
+          </p:cNvPr>
+          <p:cNvCxnSpPr>
+            <a:cxnSpLocks/>
+            <a:stCxn id="12" idx="1"/>
+            <a:endCxn id="8" idx="1"/>
+          </p:cNvCxnSpPr>
+          <p:nvPr/>
+        </p:nvCxnSpPr>
+        <p:spPr>
+          <a:xfrm rot="10800000">
+            <a:off x="365759" y="1664981"/>
+            <a:ext cx="12700" cy="3129036"/>
+          </a:xfrm>
+          <a:prstGeom prst="bentConnector3">
+            <a:avLst>
+              <a:gd name="adj1" fmla="val 1800000"/>
+            </a:avLst>
+          </a:prstGeom>
+          <a:noFill/>
+          <a:ln w="9525" cap="flat" cmpd="sng" algn="ctr">
+            <a:solidFill>
+              <a:srgbClr val="EE8F62"/>
+            </a:solidFill>
+            <a:prstDash val="solid"/>
+            <a:tailEnd type="triangle"/>
+          </a:ln>
+          <a:effectLst/>
+        </p:spPr>
+      </p:cxnSp>
+      <p:cxnSp>
+        <p:nvCxnSpPr>
+          <p:cNvPr id="76" name="直线箭头连接符 34">
+            <a:extLst>
+              <a:ext uri="{FF2B5EF4-FFF2-40B4-BE49-F238E27FC236}">
+                <a16:creationId xmlns:a16="http://schemas.microsoft.com/office/drawing/2014/main" id="{5EA95CEE-11EA-D616-CF8A-789830BFA5B3}"/>
+              </a:ext>
+            </a:extLst>
+          </p:cNvPr>
+          <p:cNvCxnSpPr>
+            <a:cxnSpLocks/>
+            <a:stCxn id="38" idx="1"/>
+            <a:endCxn id="28" idx="3"/>
+          </p:cNvCxnSpPr>
+          <p:nvPr/>
+        </p:nvCxnSpPr>
+        <p:spPr>
+          <a:xfrm flipH="1">
+            <a:off x="2641925" y="3229392"/>
+            <a:ext cx="605779" cy="107"/>
+          </a:xfrm>
+          <a:prstGeom prst="straightConnector1">
+            <a:avLst/>
+          </a:prstGeom>
+          <a:noFill/>
+          <a:ln w="10795" cap="flat" cmpd="sng" algn="ctr">
+            <a:solidFill>
+              <a:srgbClr val="35C3F7"/>
+            </a:solidFill>
+            <a:prstDash val="solid"/>
+            <a:tailEnd type="triangle"/>
+          </a:ln>
+          <a:effectLst/>
+        </p:spPr>
+      </p:cxnSp>
+      <p:cxnSp>
+        <p:nvCxnSpPr>
+          <p:cNvPr id="88" name="肘形连接符 107">
+            <a:extLst>
+              <a:ext uri="{FF2B5EF4-FFF2-40B4-BE49-F238E27FC236}">
+                <a16:creationId xmlns:a16="http://schemas.microsoft.com/office/drawing/2014/main" id="{F2AC3A42-2B60-BE02-3ACD-B4EAF98961C9}"/>
+              </a:ext>
+            </a:extLst>
+          </p:cNvPr>
+          <p:cNvCxnSpPr>
+            <a:cxnSpLocks/>
+            <a:stCxn id="9" idx="2"/>
+            <a:endCxn id="28" idx="0"/>
+          </p:cNvCxnSpPr>
+          <p:nvPr/>
+        </p:nvCxnSpPr>
+        <p:spPr>
+          <a:xfrm>
+            <a:off x="1503842" y="2693158"/>
+            <a:ext cx="1" cy="290422"/>
+          </a:xfrm>
+          <a:prstGeom prst="straightConnector1">
+            <a:avLst/>
+          </a:prstGeom>
+          <a:noFill/>
+          <a:ln w="12700" cap="flat" cmpd="sng" algn="ctr">
+            <a:solidFill>
+              <a:srgbClr val="29484D"/>
+            </a:solidFill>
+            <a:prstDash val="solid"/>
+            <a:tailEnd type="triangle"/>
+          </a:ln>
+          <a:effectLst/>
+        </p:spPr>
+      </p:cxnSp>
+      <p:cxnSp>
+        <p:nvCxnSpPr>
+          <p:cNvPr id="93" name="连接符: 肘形 92">
+            <a:extLst>
+              <a:ext uri="{FF2B5EF4-FFF2-40B4-BE49-F238E27FC236}">
+                <a16:creationId xmlns:a16="http://schemas.microsoft.com/office/drawing/2014/main" id="{F64DEB83-6BD3-CFD7-EA1D-63B72DCFD084}"/>
+              </a:ext>
+            </a:extLst>
+          </p:cNvPr>
+          <p:cNvCxnSpPr>
+            <a:cxnSpLocks/>
+            <a:stCxn id="10" idx="3"/>
+            <a:endCxn id="3" idx="1"/>
+          </p:cNvCxnSpPr>
+          <p:nvPr/>
+        </p:nvCxnSpPr>
+        <p:spPr>
+          <a:xfrm>
+            <a:off x="2641925" y="4011758"/>
+            <a:ext cx="605779" cy="335078"/>
+          </a:xfrm>
+          <a:prstGeom prst="bentConnector3">
+            <a:avLst>
+              <a:gd name="adj1" fmla="val 50000"/>
+            </a:avLst>
+          </a:prstGeom>
+          <a:noFill/>
+          <a:ln w="6350" cap="flat" cmpd="sng" algn="ctr">
+            <a:solidFill>
+              <a:srgbClr val="35C3F7"/>
+            </a:solidFill>
+            <a:prstDash val="solid"/>
+            <a:miter lim="800000"/>
+            <a:tailEnd type="triangle"/>
+          </a:ln>
+          <a:effectLst/>
+        </p:spPr>
+      </p:cxnSp>
+      <p:cxnSp>
+        <p:nvCxnSpPr>
+          <p:cNvPr id="96" name="连接符: 肘形 95">
+            <a:extLst>
+              <a:ext uri="{FF2B5EF4-FFF2-40B4-BE49-F238E27FC236}">
+                <a16:creationId xmlns:a16="http://schemas.microsoft.com/office/drawing/2014/main" id="{52C96882-D97A-826B-0CCA-1924A791F586}"/>
+              </a:ext>
+            </a:extLst>
+          </p:cNvPr>
+          <p:cNvCxnSpPr>
+            <a:cxnSpLocks/>
+            <a:stCxn id="10" idx="3"/>
+            <a:endCxn id="6" idx="1"/>
+          </p:cNvCxnSpPr>
+          <p:nvPr/>
+        </p:nvCxnSpPr>
+        <p:spPr>
+          <a:xfrm flipV="1">
+            <a:off x="2641925" y="3746058"/>
+            <a:ext cx="605779" cy="265700"/>
+          </a:xfrm>
+          <a:prstGeom prst="bentConnector3">
+            <a:avLst>
+              <a:gd name="adj1" fmla="val 50000"/>
+            </a:avLst>
+          </a:prstGeom>
+          <a:noFill/>
+          <a:ln w="6350" cap="flat" cmpd="sng" algn="ctr">
+            <a:solidFill>
+              <a:srgbClr val="35C3F7"/>
+            </a:solidFill>
+            <a:prstDash val="solid"/>
+            <a:miter lim="800000"/>
+            <a:tailEnd type="triangle"/>
+          </a:ln>
+          <a:effectLst/>
+        </p:spPr>
+      </p:cxnSp>
+      <p:sp>
+        <p:nvSpPr>
+          <p:cNvPr id="100" name="文本框 99">
+            <a:extLst>
+              <a:ext uri="{FF2B5EF4-FFF2-40B4-BE49-F238E27FC236}">
+                <a16:creationId xmlns:a16="http://schemas.microsoft.com/office/drawing/2014/main" id="{783FD9D4-4556-5324-0A9E-09F61CB50839}"/>
+              </a:ext>
+            </a:extLst>
+          </p:cNvPr>
+          <p:cNvSpPr txBox="1"/>
+          <p:nvPr/>
+        </p:nvSpPr>
+        <p:spPr>
+          <a:xfrm>
+            <a:off x="4970260" y="3032210"/>
+            <a:ext cx="4106281" cy="2097754"/>
+          </a:xfrm>
+          <a:prstGeom prst="rect">
+            <a:avLst/>
+          </a:prstGeom>
+          <a:noFill/>
+          <a:ln>
+            <a:solidFill>
+              <a:schemeClr val="accent1"/>
+            </a:solidFill>
+          </a:ln>
+        </p:spPr>
+        <p:txBody>
+          <a:bodyPr wrap="square">
+            <a:spAutoFit/>
+          </a:bodyPr>
+          <a:lstStyle/>
+          <a:p>
+            <a:pPr>
+              <a:lnSpc>
+                <a:spcPct val="150000"/>
+              </a:lnSpc>
+            </a:pPr>
+            <a:r>
+              <a:rPr lang="en-US" altLang="zh-CN" sz="1100" b="1" dirty="0"/>
+              <a:t>Phase 2: </a:t>
+            </a:r>
+            <a:r>
+              <a:rPr lang="zh-CN" altLang="en-US" sz="1100" b="1" dirty="0"/>
+              <a:t>任务规划</a:t>
+            </a:r>
+          </a:p>
+          <a:p>
+            <a:pPr>
+              <a:lnSpc>
+                <a:spcPct val="150000"/>
+              </a:lnSpc>
+            </a:pPr>
+            <a:r>
+              <a:rPr lang="en-US" altLang="zh-CN" sz="1100" dirty="0"/>
+              <a:t>LLM </a:t>
+            </a:r>
+            <a:r>
+              <a:rPr lang="zh-CN" altLang="en-US" sz="1100" dirty="0"/>
+              <a:t>生成初步计划 </a:t>
+            </a:r>
+            <a:r>
+              <a:rPr lang="en-US" altLang="zh-CN" sz="1100" dirty="0"/>
+              <a:t>-&gt; </a:t>
+            </a:r>
+            <a:r>
+              <a:rPr lang="zh-CN" altLang="en-US" sz="1100" dirty="0"/>
+              <a:t>本体验证 </a:t>
+            </a:r>
+            <a:r>
+              <a:rPr lang="en-US" altLang="zh-CN" sz="1100" dirty="0"/>
+              <a:t>-&gt; </a:t>
+            </a:r>
+            <a:r>
+              <a:rPr lang="zh-CN" altLang="en-US" sz="1100" dirty="0"/>
+              <a:t>修正计划</a:t>
+            </a:r>
+          </a:p>
+          <a:p>
+            <a:pPr>
+              <a:lnSpc>
+                <a:spcPct val="150000"/>
+              </a:lnSpc>
+            </a:pPr>
+            <a:r>
+              <a:rPr lang="en-US" altLang="zh-CN" sz="1100" b="1" dirty="0"/>
+              <a:t>Phase 3: </a:t>
+            </a:r>
+            <a:r>
+              <a:rPr lang="zh-CN" altLang="en-US" sz="1100" b="1" dirty="0"/>
+              <a:t>数据获取</a:t>
+            </a:r>
+          </a:p>
+          <a:p>
+            <a:pPr>
+              <a:lnSpc>
+                <a:spcPct val="150000"/>
+              </a:lnSpc>
+            </a:pPr>
+            <a:r>
+              <a:rPr lang="en-US" altLang="zh-CN" sz="1100" dirty="0"/>
+              <a:t>LLM </a:t>
+            </a:r>
+            <a:r>
+              <a:rPr lang="zh-CN" altLang="en-US" sz="1100" dirty="0"/>
+              <a:t>执行查询 </a:t>
+            </a:r>
+            <a:r>
+              <a:rPr lang="en-US" altLang="zh-CN" sz="1100" dirty="0"/>
+              <a:t>-&gt; </a:t>
+            </a:r>
+            <a:r>
+              <a:rPr lang="zh-CN" altLang="en-US" sz="1100" dirty="0"/>
+              <a:t>拿到原始数据 </a:t>
+            </a:r>
+            <a:r>
+              <a:rPr lang="en-US" altLang="zh-CN" sz="1100" dirty="0"/>
+              <a:t>-&gt; </a:t>
+            </a:r>
+            <a:r>
+              <a:rPr lang="zh-CN" altLang="en-US" sz="1100" dirty="0"/>
+              <a:t>问本体这数字什么意思</a:t>
+            </a:r>
+          </a:p>
+          <a:p>
+            <a:pPr>
+              <a:lnSpc>
+                <a:spcPct val="150000"/>
+              </a:lnSpc>
+            </a:pPr>
+            <a:r>
+              <a:rPr lang="en-US" altLang="zh-CN" sz="1100" b="1" dirty="0"/>
+              <a:t>Phase 4: </a:t>
+            </a:r>
+            <a:r>
+              <a:rPr lang="zh-CN" altLang="en-US" sz="1100" b="1" dirty="0"/>
+              <a:t>综合推理</a:t>
+            </a:r>
+          </a:p>
+          <a:p>
+            <a:pPr>
+              <a:lnSpc>
+                <a:spcPct val="150000"/>
+              </a:lnSpc>
+            </a:pPr>
+            <a:r>
+              <a:rPr lang="en-US" altLang="zh-CN" sz="1100" dirty="0"/>
+              <a:t>LLM </a:t>
+            </a:r>
+            <a:r>
+              <a:rPr lang="zh-CN" altLang="en-US" sz="1100" dirty="0"/>
+              <a:t>提交事实 </a:t>
+            </a:r>
+            <a:r>
+              <a:rPr lang="en-US" altLang="zh-CN" sz="1100" dirty="0"/>
+              <a:t>-&gt; </a:t>
+            </a:r>
+            <a:r>
+              <a:rPr lang="zh-CN" altLang="en-US" sz="1100" dirty="0"/>
+              <a:t>本体规则引擎计算 </a:t>
+            </a:r>
+            <a:r>
+              <a:rPr lang="en-US" altLang="zh-CN" sz="1100" dirty="0"/>
+              <a:t>-&gt; LLM </a:t>
+            </a:r>
+            <a:r>
+              <a:rPr lang="zh-CN" altLang="en-US" sz="1100" dirty="0"/>
+              <a:t>解释结论</a:t>
+            </a:r>
+          </a:p>
+          <a:p>
+            <a:pPr>
+              <a:lnSpc>
+                <a:spcPct val="150000"/>
+              </a:lnSpc>
+            </a:pPr>
+            <a:r>
+              <a:rPr lang="en-US" altLang="zh-CN" sz="1100" b="1" dirty="0"/>
+              <a:t>Phase 5: </a:t>
+            </a:r>
+            <a:r>
+              <a:rPr lang="zh-CN" altLang="en-US" sz="1100" b="1" dirty="0"/>
+              <a:t>结果沉淀</a:t>
+            </a:r>
+          </a:p>
+          <a:p>
+            <a:pPr>
+              <a:lnSpc>
+                <a:spcPct val="150000"/>
+              </a:lnSpc>
+            </a:pPr>
+            <a:r>
+              <a:rPr lang="en-US" altLang="zh-CN" sz="1100" dirty="0"/>
+              <a:t>LLM </a:t>
+            </a:r>
+            <a:r>
+              <a:rPr lang="zh-CN" altLang="en-US" sz="1100" dirty="0"/>
+              <a:t>总结案例 </a:t>
+            </a:r>
+            <a:r>
+              <a:rPr lang="en-US" altLang="zh-CN" sz="1100" dirty="0"/>
+              <a:t>-&gt; </a:t>
+            </a:r>
+            <a:r>
+              <a:rPr lang="zh-CN" altLang="en-US" sz="1100" dirty="0"/>
+              <a:t>本体存储并发现规则盲区</a:t>
+            </a:r>
+          </a:p>
+        </p:txBody>
+      </p:sp>
+      <p:sp>
+        <p:nvSpPr>
+          <p:cNvPr id="2" name="矩形: 圆角 1">
+            <a:extLst>
+              <a:ext uri="{FF2B5EF4-FFF2-40B4-BE49-F238E27FC236}">
+                <a16:creationId xmlns:a16="http://schemas.microsoft.com/office/drawing/2014/main" id="{1CAAD63A-4E64-35D6-60D1-6764D9663C1A}"/>
+              </a:ext>
+            </a:extLst>
+          </p:cNvPr>
+          <p:cNvSpPr/>
+          <p:nvPr/>
+        </p:nvSpPr>
+        <p:spPr>
+          <a:xfrm>
+            <a:off x="3247704" y="3938447"/>
+            <a:ext cx="1461027" cy="216000"/>
           </a:xfrm>
           <a:prstGeom prst="roundRect">
             <a:avLst/>
@@ -49300,7 +49846,7 @@
               <a:defRPr/>
             </a:pPr>
             <a:r>
-              <a:rPr kumimoji="0" lang="zh-CN" altLang="en-US" sz="1400" b="0" i="0" u="none" strike="noStrike" kern="0" cap="none" spc="0" normalizeH="0" baseline="0" noProof="0" dirty="0">
+              <a:rPr kumimoji="0" lang="zh-CN" altLang="en-US" sz="1100" b="0" i="0" u="none" strike="noStrike" kern="0" cap="none" spc="0" normalizeH="0" baseline="0" noProof="0" dirty="0">
                 <a:ln>
                   <a:noFill/>
                 </a:ln>
@@ -49321,10 +49867,10 @@
       </p:sp>
       <p:sp>
         <p:nvSpPr>
-          <p:cNvPr id="30" name="矩形: 圆角 29">
+          <p:cNvPr id="3" name="矩形: 圆角 2">
             <a:extLst>
               <a:ext uri="{FF2B5EF4-FFF2-40B4-BE49-F238E27FC236}">
-                <a16:creationId xmlns:a16="http://schemas.microsoft.com/office/drawing/2014/main" id="{1B90DDAC-BA1C-507C-2497-ED1CCE244A01}"/>
+                <a16:creationId xmlns:a16="http://schemas.microsoft.com/office/drawing/2014/main" id="{A8796969-B9C7-4796-4FBC-FC3ED8ECB42C}"/>
               </a:ext>
             </a:extLst>
           </p:cNvPr>
@@ -49333,8 +49879,8 @@
         </p:nvSpPr>
         <p:spPr>
           <a:xfrm>
-            <a:off x="3247704" y="4427990"/>
-            <a:ext cx="1461027" cy="256652"/>
+            <a:off x="3247704" y="4238836"/>
+            <a:ext cx="1461027" cy="216000"/>
           </a:xfrm>
           <a:prstGeom prst="roundRect">
             <a:avLst/>
@@ -49376,7 +49922,7 @@
               <a:defRPr/>
             </a:pPr>
             <a:r>
-              <a:rPr kumimoji="0" lang="zh-CN" altLang="en-US" sz="1400" b="0" i="0" u="none" strike="noStrike" kern="0" cap="none" spc="0" normalizeH="0" baseline="0" noProof="0" dirty="0">
+              <a:rPr kumimoji="0" lang="zh-CN" altLang="en-US" sz="1100" b="0" i="0" u="none" strike="noStrike" kern="0" cap="none" spc="0" normalizeH="0" baseline="0" noProof="0" dirty="0">
                 <a:ln>
                   <a:noFill/>
                 </a:ln>
@@ -49397,10 +49943,10 @@
       </p:sp>
       <p:sp>
         <p:nvSpPr>
-          <p:cNvPr id="31" name="矩形: 圆角 30">
+          <p:cNvPr id="4" name="矩形: 圆角 3">
             <a:extLst>
               <a:ext uri="{FF2B5EF4-FFF2-40B4-BE49-F238E27FC236}">
-                <a16:creationId xmlns:a16="http://schemas.microsoft.com/office/drawing/2014/main" id="{0868EFF6-7B66-71F0-EBCF-10DE05EB2560}"/>
+                <a16:creationId xmlns:a16="http://schemas.microsoft.com/office/drawing/2014/main" id="{F1CB9E6E-117B-156D-D38E-2A022337945E}"/>
               </a:ext>
             </a:extLst>
           </p:cNvPr>
@@ -49409,8 +49955,8 @@
         </p:nvSpPr>
         <p:spPr>
           <a:xfrm>
-            <a:off x="3247704" y="4774893"/>
-            <a:ext cx="1461027" cy="256652"/>
+            <a:off x="3247704" y="4539225"/>
+            <a:ext cx="1461027" cy="216000"/>
           </a:xfrm>
           <a:prstGeom prst="roundRect">
             <a:avLst/>
@@ -49452,7 +49998,7 @@
               <a:defRPr/>
             </a:pPr>
             <a:r>
-              <a:rPr kumimoji="0" lang="zh-CN" altLang="en-US" sz="1400" b="0" i="0" u="none" strike="noStrike" kern="0" cap="none" spc="0" normalizeH="0" baseline="0" noProof="0" dirty="0">
+              <a:rPr kumimoji="0" lang="zh-CN" altLang="en-US" sz="1100" b="0" i="0" u="none" strike="noStrike" kern="0" cap="none" spc="0" normalizeH="0" baseline="0" noProof="0" dirty="0">
                 <a:ln>
                   <a:noFill/>
                 </a:ln>
@@ -49471,129 +50017,22 @@
           </a:p>
         </p:txBody>
       </p:sp>
-      <p:cxnSp>
-        <p:nvCxnSpPr>
-          <p:cNvPr id="32" name="连接符: 肘形 31">
+      <p:sp>
+        <p:nvSpPr>
+          <p:cNvPr id="6" name="矩形: 圆角 5">
             <a:extLst>
               <a:ext uri="{FF2B5EF4-FFF2-40B4-BE49-F238E27FC236}">
-                <a16:creationId xmlns:a16="http://schemas.microsoft.com/office/drawing/2014/main" id="{411F6272-2E3A-1B6B-B5DE-A2E736113581}"/>
+                <a16:creationId xmlns:a16="http://schemas.microsoft.com/office/drawing/2014/main" id="{33C447D8-0465-D444-C028-719D104B996C}"/>
               </a:ext>
             </a:extLst>
           </p:cNvPr>
-          <p:cNvCxnSpPr>
-            <a:cxnSpLocks/>
-            <a:stCxn id="10" idx="3"/>
-            <a:endCxn id="29" idx="1"/>
-          </p:cNvCxnSpPr>
-          <p:nvPr/>
-        </p:nvCxnSpPr>
-        <p:spPr>
-          <a:xfrm>
-            <a:off x="2641925" y="4011758"/>
-            <a:ext cx="605779" cy="197655"/>
-          </a:xfrm>
-          <a:prstGeom prst="bentConnector3">
-            <a:avLst/>
-          </a:prstGeom>
-          <a:noFill/>
-          <a:ln w="6350" cap="flat" cmpd="sng" algn="ctr">
-            <a:solidFill>
-              <a:srgbClr val="35C3F7"/>
-            </a:solidFill>
-            <a:prstDash val="solid"/>
-            <a:miter lim="800000"/>
-            <a:tailEnd type="triangle"/>
-          </a:ln>
-          <a:effectLst/>
-        </p:spPr>
-      </p:cxnSp>
-      <p:cxnSp>
-        <p:nvCxnSpPr>
-          <p:cNvPr id="33" name="连接符: 肘形 32">
-            <a:extLst>
-              <a:ext uri="{FF2B5EF4-FFF2-40B4-BE49-F238E27FC236}">
-                <a16:creationId xmlns:a16="http://schemas.microsoft.com/office/drawing/2014/main" id="{93DEB8E6-8F50-239C-D709-5E8EC6046127}"/>
-              </a:ext>
-            </a:extLst>
-          </p:cNvPr>
-          <p:cNvCxnSpPr>
-            <a:cxnSpLocks/>
-            <a:stCxn id="10" idx="3"/>
-            <a:endCxn id="31" idx="1"/>
-          </p:cNvCxnSpPr>
-          <p:nvPr/>
-        </p:nvCxnSpPr>
-        <p:spPr>
-          <a:xfrm>
-            <a:off x="2641925" y="4011758"/>
-            <a:ext cx="605779" cy="891461"/>
-          </a:xfrm>
-          <a:prstGeom prst="bentConnector3">
-            <a:avLst/>
-          </a:prstGeom>
-          <a:noFill/>
-          <a:ln w="6350" cap="flat" cmpd="sng" algn="ctr">
-            <a:solidFill>
-              <a:srgbClr val="35C3F7"/>
-            </a:solidFill>
-            <a:prstDash val="solid"/>
-            <a:miter lim="800000"/>
-            <a:tailEnd type="triangle"/>
-          </a:ln>
-          <a:effectLst/>
-        </p:spPr>
-      </p:cxnSp>
-      <p:cxnSp>
-        <p:nvCxnSpPr>
-          <p:cNvPr id="34" name="直线箭头连接符 34">
-            <a:extLst>
-              <a:ext uri="{FF2B5EF4-FFF2-40B4-BE49-F238E27FC236}">
-                <a16:creationId xmlns:a16="http://schemas.microsoft.com/office/drawing/2014/main" id="{474092B0-E2AC-9CC9-5B40-7F422E37FF66}"/>
-              </a:ext>
-            </a:extLst>
-          </p:cNvPr>
-          <p:cNvCxnSpPr>
-            <a:cxnSpLocks/>
-            <a:stCxn id="10" idx="2"/>
-            <a:endCxn id="12" idx="0"/>
-          </p:cNvCxnSpPr>
-          <p:nvPr/>
-        </p:nvCxnSpPr>
-        <p:spPr>
-          <a:xfrm>
-            <a:off x="1503842" y="4257676"/>
-            <a:ext cx="0" cy="290422"/>
-          </a:xfrm>
-          <a:prstGeom prst="straightConnector1">
-            <a:avLst/>
-          </a:prstGeom>
-          <a:noFill/>
-          <a:ln w="10795" cap="flat" cmpd="sng" algn="ctr">
-            <a:solidFill>
-              <a:srgbClr val="35C3F7"/>
-            </a:solidFill>
-            <a:prstDash val="solid"/>
-            <a:tailEnd type="triangle"/>
-          </a:ln>
-          <a:effectLst/>
-        </p:spPr>
-      </p:cxnSp>
-      <p:sp>
-        <p:nvSpPr>
-          <p:cNvPr id="35" name="矩形: 圆角 34">
-            <a:extLst>
-              <a:ext uri="{FF2B5EF4-FFF2-40B4-BE49-F238E27FC236}">
-                <a16:creationId xmlns:a16="http://schemas.microsoft.com/office/drawing/2014/main" id="{2F438AA9-543F-5165-C78B-9AD432C312C0}"/>
-              </a:ext>
-            </a:extLst>
-          </p:cNvPr>
           <p:cNvSpPr/>
           <p:nvPr/>
         </p:nvSpPr>
         <p:spPr>
           <a:xfrm>
             <a:off x="3247704" y="3638058"/>
-            <a:ext cx="1461027" cy="351559"/>
+            <a:ext cx="1461027" cy="216000"/>
           </a:xfrm>
           <a:prstGeom prst="roundRect">
             <a:avLst/>
@@ -49635,7 +50074,7 @@
               <a:defRPr/>
             </a:pPr>
             <a:r>
-              <a:rPr kumimoji="0" lang="en-US" altLang="zh-CN" sz="1100" b="0" i="0" u="none" strike="noStrike" kern="0" cap="none" spc="0" normalizeH="0" baseline="0" noProof="0" dirty="0">
+              <a:rPr kumimoji="0" lang="zh-CN" altLang="en-US" sz="1100" b="0" i="0" u="none" strike="noStrike" kern="0" cap="none" spc="0" normalizeH="0" baseline="0" noProof="0" dirty="0">
                 <a:ln>
                   <a:noFill/>
                 </a:ln>
@@ -49649,85 +50088,9 @@
                 <a:ea typeface="华文楷体"/>
                 <a:cs typeface="+mn-cs"/>
               </a:rPr>
-              <a:t>Rule</a:t>
-            </a:r>
-          </a:p>
-        </p:txBody>
-      </p:sp>
-      <p:sp>
-        <p:nvSpPr>
-          <p:cNvPr id="38" name="矩形: 圆角 37">
-            <a:extLst>
-              <a:ext uri="{FF2B5EF4-FFF2-40B4-BE49-F238E27FC236}">
-                <a16:creationId xmlns:a16="http://schemas.microsoft.com/office/drawing/2014/main" id="{21928885-8F3B-DEF9-5A43-D2285E987173}"/>
-              </a:ext>
-            </a:extLst>
-          </p:cNvPr>
-          <p:cNvSpPr/>
-          <p:nvPr/>
-        </p:nvSpPr>
-        <p:spPr>
-          <a:xfrm>
-            <a:off x="3247704" y="3053612"/>
-            <a:ext cx="1461027" cy="351559"/>
-          </a:xfrm>
-          <a:prstGeom prst="roundRect">
-            <a:avLst/>
-          </a:prstGeom>
-          <a:noFill/>
-          <a:ln w="6350" cap="sq" cmpd="sng" algn="ctr">
-            <a:solidFill>
-              <a:srgbClr val="29484D"/>
-            </a:solidFill>
-            <a:prstDash val="solid"/>
-            <a:miter lim="800000"/>
-          </a:ln>
-          <a:effectLst/>
-        </p:spPr>
-        <p:txBody>
-          <a:bodyPr rot="0" spcFirstLastPara="0" vertOverflow="overflow" horzOverflow="overflow" vert="horz" wrap="square" lIns="0" tIns="45720" rIns="0" bIns="45720" numCol="1" spcCol="0" rtlCol="0" fromWordArt="0" anchor="ctr" anchorCtr="0" forceAA="0" compatLnSpc="1">
-            <a:prstTxWarp prst="textNoShape">
-              <a:avLst/>
-            </a:prstTxWarp>
-            <a:noAutofit/>
-          </a:bodyPr>
-          <a:lstStyle/>
-          <a:p>
-            <a:pPr marL="0" marR="0" lvl="0" indent="0" algn="ctr" defTabSz="914400" eaLnBrk="1" fontAlgn="auto" latinLnBrk="0" hangingPunct="1">
-              <a:lnSpc>
-                <a:spcPct val="100000"/>
-              </a:lnSpc>
-              <a:spcBef>
-                <a:spcPts val="0"/>
-              </a:spcBef>
-              <a:spcAft>
-                <a:spcPts val="0"/>
-              </a:spcAft>
-              <a:buClrTx/>
-              <a:buSzTx/>
-              <a:buFontTx/>
-              <a:buNone/>
-              <a:tabLst/>
-              <a:defRPr/>
-            </a:pPr>
-            <a:r>
-              <a:rPr kumimoji="0" lang="zh-CN" altLang="en-US" sz="800" b="0" i="0" u="none" strike="noStrike" kern="0" cap="none" spc="0" normalizeH="0" baseline="0" noProof="0" dirty="0">
-                <a:ln>
-                  <a:noFill/>
-                </a:ln>
-                <a:solidFill>
-                  <a:srgbClr val="000000"/>
-                </a:solidFill>
-                <a:effectLst/>
-                <a:uLnTx/>
-                <a:uFillTx/>
-                <a:latin typeface="华文楷体"/>
-                <a:ea typeface="华文楷体"/>
-                <a:cs typeface="+mn-cs"/>
-              </a:rPr>
-              <a:t>本体模型（专业外脑）</a:t>
-            </a:r>
-            <a:endParaRPr kumimoji="0" lang="en-US" altLang="zh-CN" sz="800" b="0" i="0" u="none" strike="noStrike" kern="0" cap="none" spc="0" normalizeH="0" baseline="0" noProof="0" dirty="0">
+              <a:t>权限检查</a:t>
+            </a:r>
+            <a:endParaRPr kumimoji="0" lang="en-US" altLang="zh-CN" sz="1100" b="0" i="0" u="none" strike="noStrike" kern="0" cap="none" spc="0" normalizeH="0" baseline="0" noProof="0" dirty="0">
               <a:ln>
                 <a:noFill/>
               </a:ln>
@@ -49741,435 +50104,6 @@
               <a:ea typeface="华文楷体"/>
               <a:cs typeface="+mn-cs"/>
             </a:endParaRPr>
-          </a:p>
-          <a:p>
-            <a:pPr marL="0" marR="0" lvl="0" indent="0" algn="ctr" defTabSz="914400" eaLnBrk="1" fontAlgn="auto" latinLnBrk="0" hangingPunct="1">
-              <a:lnSpc>
-                <a:spcPct val="100000"/>
-              </a:lnSpc>
-              <a:spcBef>
-                <a:spcPts val="0"/>
-              </a:spcBef>
-              <a:spcAft>
-                <a:spcPts val="0"/>
-              </a:spcAft>
-              <a:buClrTx/>
-              <a:buSzTx/>
-              <a:buFontTx/>
-              <a:buNone/>
-              <a:tabLst/>
-              <a:defRPr/>
-            </a:pPr>
-            <a:r>
-              <a:rPr kumimoji="0" lang="zh-CN" altLang="en-US" sz="800" b="0" i="0" u="none" strike="noStrike" kern="0" cap="none" spc="0" normalizeH="0" baseline="0" noProof="0" dirty="0">
-                <a:ln>
-                  <a:noFill/>
-                </a:ln>
-                <a:solidFill>
-                  <a:srgbClr val="000000"/>
-                </a:solidFill>
-                <a:effectLst/>
-                <a:uLnTx/>
-                <a:uFillTx/>
-                <a:latin typeface="华文楷体"/>
-                <a:ea typeface="华文楷体"/>
-                <a:cs typeface="+mn-cs"/>
-              </a:rPr>
-              <a:t>获取本体定义的合法操作</a:t>
-            </a:r>
-          </a:p>
-        </p:txBody>
-      </p:sp>
-      <p:cxnSp>
-        <p:nvCxnSpPr>
-          <p:cNvPr id="41" name="直线箭头连接符 34">
-            <a:extLst>
-              <a:ext uri="{FF2B5EF4-FFF2-40B4-BE49-F238E27FC236}">
-                <a16:creationId xmlns:a16="http://schemas.microsoft.com/office/drawing/2014/main" id="{B8332B02-0989-802E-B9C9-664F8EB2C313}"/>
-              </a:ext>
-            </a:extLst>
-          </p:cNvPr>
-          <p:cNvCxnSpPr>
-            <a:cxnSpLocks/>
-            <a:stCxn id="12" idx="1"/>
-            <a:endCxn id="8" idx="1"/>
-          </p:cNvCxnSpPr>
-          <p:nvPr/>
-        </p:nvCxnSpPr>
-        <p:spPr>
-          <a:xfrm rot="10800000">
-            <a:off x="365759" y="1664981"/>
-            <a:ext cx="12700" cy="3129036"/>
-          </a:xfrm>
-          <a:prstGeom prst="bentConnector3">
-            <a:avLst>
-              <a:gd name="adj1" fmla="val 1800000"/>
-            </a:avLst>
-          </a:prstGeom>
-          <a:noFill/>
-          <a:ln w="9525" cap="flat" cmpd="sng" algn="ctr">
-            <a:solidFill>
-              <a:srgbClr val="EE8F62"/>
-            </a:solidFill>
-            <a:prstDash val="solid"/>
-            <a:tailEnd type="triangle"/>
-          </a:ln>
-          <a:effectLst/>
-        </p:spPr>
-      </p:cxnSp>
-      <p:cxnSp>
-        <p:nvCxnSpPr>
-          <p:cNvPr id="76" name="直线箭头连接符 34">
-            <a:extLst>
-              <a:ext uri="{FF2B5EF4-FFF2-40B4-BE49-F238E27FC236}">
-                <a16:creationId xmlns:a16="http://schemas.microsoft.com/office/drawing/2014/main" id="{5EA95CEE-11EA-D616-CF8A-789830BFA5B3}"/>
-              </a:ext>
-            </a:extLst>
-          </p:cNvPr>
-          <p:cNvCxnSpPr>
-            <a:cxnSpLocks/>
-            <a:stCxn id="38" idx="1"/>
-            <a:endCxn id="28" idx="3"/>
-          </p:cNvCxnSpPr>
-          <p:nvPr/>
-        </p:nvCxnSpPr>
-        <p:spPr>
-          <a:xfrm flipH="1">
-            <a:off x="2641925" y="3229392"/>
-            <a:ext cx="605779" cy="107"/>
-          </a:xfrm>
-          <a:prstGeom prst="straightConnector1">
-            <a:avLst/>
-          </a:prstGeom>
-          <a:noFill/>
-          <a:ln w="10795" cap="flat" cmpd="sng" algn="ctr">
-            <a:solidFill>
-              <a:srgbClr val="35C3F7"/>
-            </a:solidFill>
-            <a:prstDash val="solid"/>
-            <a:tailEnd type="triangle"/>
-          </a:ln>
-          <a:effectLst/>
-        </p:spPr>
-      </p:cxnSp>
-      <p:cxnSp>
-        <p:nvCxnSpPr>
-          <p:cNvPr id="88" name="肘形连接符 107">
-            <a:extLst>
-              <a:ext uri="{FF2B5EF4-FFF2-40B4-BE49-F238E27FC236}">
-                <a16:creationId xmlns:a16="http://schemas.microsoft.com/office/drawing/2014/main" id="{F2AC3A42-2B60-BE02-3ACD-B4EAF98961C9}"/>
-              </a:ext>
-            </a:extLst>
-          </p:cNvPr>
-          <p:cNvCxnSpPr>
-            <a:cxnSpLocks/>
-            <a:stCxn id="9" idx="2"/>
-            <a:endCxn id="28" idx="0"/>
-          </p:cNvCxnSpPr>
-          <p:nvPr/>
-        </p:nvCxnSpPr>
-        <p:spPr>
-          <a:xfrm>
-            <a:off x="1503842" y="2693158"/>
-            <a:ext cx="1" cy="290422"/>
-          </a:xfrm>
-          <a:prstGeom prst="straightConnector1">
-            <a:avLst/>
-          </a:prstGeom>
-          <a:noFill/>
-          <a:ln w="12700" cap="flat" cmpd="sng" algn="ctr">
-            <a:solidFill>
-              <a:srgbClr val="29484D"/>
-            </a:solidFill>
-            <a:prstDash val="solid"/>
-            <a:tailEnd type="triangle"/>
-          </a:ln>
-          <a:effectLst/>
-        </p:spPr>
-      </p:cxnSp>
-      <p:cxnSp>
-        <p:nvCxnSpPr>
-          <p:cNvPr id="93" name="连接符: 肘形 92">
-            <a:extLst>
-              <a:ext uri="{FF2B5EF4-FFF2-40B4-BE49-F238E27FC236}">
-                <a16:creationId xmlns:a16="http://schemas.microsoft.com/office/drawing/2014/main" id="{F64DEB83-6BD3-CFD7-EA1D-63B72DCFD084}"/>
-              </a:ext>
-            </a:extLst>
-          </p:cNvPr>
-          <p:cNvCxnSpPr>
-            <a:cxnSpLocks/>
-            <a:stCxn id="10" idx="3"/>
-            <a:endCxn id="30" idx="1"/>
-          </p:cNvCxnSpPr>
-          <p:nvPr/>
-        </p:nvCxnSpPr>
-        <p:spPr>
-          <a:xfrm>
-            <a:off x="2641925" y="4011758"/>
-            <a:ext cx="605779" cy="544558"/>
-          </a:xfrm>
-          <a:prstGeom prst="bentConnector3">
-            <a:avLst>
-              <a:gd name="adj1" fmla="val 50000"/>
-            </a:avLst>
-          </a:prstGeom>
-          <a:noFill/>
-          <a:ln w="6350" cap="flat" cmpd="sng" algn="ctr">
-            <a:solidFill>
-              <a:srgbClr val="35C3F7"/>
-            </a:solidFill>
-            <a:prstDash val="solid"/>
-            <a:miter lim="800000"/>
-            <a:tailEnd type="triangle"/>
-          </a:ln>
-          <a:effectLst/>
-        </p:spPr>
-      </p:cxnSp>
-      <p:cxnSp>
-        <p:nvCxnSpPr>
-          <p:cNvPr id="96" name="连接符: 肘形 95">
-            <a:extLst>
-              <a:ext uri="{FF2B5EF4-FFF2-40B4-BE49-F238E27FC236}">
-                <a16:creationId xmlns:a16="http://schemas.microsoft.com/office/drawing/2014/main" id="{52C96882-D97A-826B-0CCA-1924A791F586}"/>
-              </a:ext>
-            </a:extLst>
-          </p:cNvPr>
-          <p:cNvCxnSpPr>
-            <a:cxnSpLocks/>
-            <a:stCxn id="10" idx="3"/>
-            <a:endCxn id="35" idx="1"/>
-          </p:cNvCxnSpPr>
-          <p:nvPr/>
-        </p:nvCxnSpPr>
-        <p:spPr>
-          <a:xfrm flipV="1">
-            <a:off x="2641925" y="3813838"/>
-            <a:ext cx="605779" cy="197920"/>
-          </a:xfrm>
-          <a:prstGeom prst="bentConnector3">
-            <a:avLst>
-              <a:gd name="adj1" fmla="val 50000"/>
-            </a:avLst>
-          </a:prstGeom>
-          <a:noFill/>
-          <a:ln w="6350" cap="flat" cmpd="sng" algn="ctr">
-            <a:solidFill>
-              <a:srgbClr val="35C3F7"/>
-            </a:solidFill>
-            <a:prstDash val="solid"/>
-            <a:miter lim="800000"/>
-            <a:tailEnd type="triangle"/>
-          </a:ln>
-          <a:effectLst/>
-        </p:spPr>
-      </p:cxnSp>
-      <p:sp>
-        <p:nvSpPr>
-          <p:cNvPr id="100" name="文本框 99">
-            <a:extLst>
-              <a:ext uri="{FF2B5EF4-FFF2-40B4-BE49-F238E27FC236}">
-                <a16:creationId xmlns:a16="http://schemas.microsoft.com/office/drawing/2014/main" id="{783FD9D4-4556-5324-0A9E-09F61CB50839}"/>
-              </a:ext>
-            </a:extLst>
-          </p:cNvPr>
-          <p:cNvSpPr txBox="1"/>
-          <p:nvPr/>
-        </p:nvSpPr>
-        <p:spPr>
-          <a:xfrm>
-            <a:off x="4970260" y="3032210"/>
-            <a:ext cx="4106281" cy="2097754"/>
-          </a:xfrm>
-          <a:prstGeom prst="rect">
-            <a:avLst/>
-          </a:prstGeom>
-          <a:noFill/>
-          <a:ln>
-            <a:solidFill>
-              <a:schemeClr val="accent1"/>
-            </a:solidFill>
-          </a:ln>
-        </p:spPr>
-        <p:txBody>
-          <a:bodyPr wrap="square">
-            <a:spAutoFit/>
-          </a:bodyPr>
-          <a:lstStyle/>
-          <a:p>
-            <a:pPr>
-              <a:lnSpc>
-                <a:spcPct val="150000"/>
-              </a:lnSpc>
-            </a:pPr>
-            <a:r>
-              <a:rPr lang="en-US" altLang="zh-CN" sz="1100" b="1" dirty="0"/>
-              <a:t>Phase 2: </a:t>
-            </a:r>
-            <a:r>
-              <a:rPr lang="zh-CN" altLang="en-US" sz="1100" b="1" dirty="0"/>
-              <a:t>任务规划</a:t>
-            </a:r>
-          </a:p>
-          <a:p>
-            <a:pPr>
-              <a:lnSpc>
-                <a:spcPct val="150000"/>
-              </a:lnSpc>
-            </a:pPr>
-            <a:r>
-              <a:rPr lang="en-US" altLang="zh-CN" sz="1100" dirty="0"/>
-              <a:t>LLM </a:t>
-            </a:r>
-            <a:r>
-              <a:rPr lang="zh-CN" altLang="en-US" sz="1100" dirty="0"/>
-              <a:t>生成初步计划 </a:t>
-            </a:r>
-            <a:r>
-              <a:rPr lang="en-US" altLang="zh-CN" sz="1100" dirty="0"/>
-              <a:t>-&gt; </a:t>
-            </a:r>
-            <a:r>
-              <a:rPr lang="zh-CN" altLang="en-US" sz="1100" dirty="0"/>
-              <a:t>本体验证 </a:t>
-            </a:r>
-            <a:r>
-              <a:rPr lang="en-US" altLang="zh-CN" sz="1100" dirty="0"/>
-              <a:t>-&gt; </a:t>
-            </a:r>
-            <a:r>
-              <a:rPr lang="zh-CN" altLang="en-US" sz="1100" dirty="0"/>
-              <a:t>修正计划</a:t>
-            </a:r>
-          </a:p>
-          <a:p>
-            <a:pPr>
-              <a:lnSpc>
-                <a:spcPct val="150000"/>
-              </a:lnSpc>
-            </a:pPr>
-            <a:r>
-              <a:rPr lang="en-US" altLang="zh-CN" sz="1100" b="1" dirty="0"/>
-              <a:t>Phase 3: </a:t>
-            </a:r>
-            <a:r>
-              <a:rPr lang="zh-CN" altLang="en-US" sz="1100" b="1" dirty="0"/>
-              <a:t>数据获取</a:t>
-            </a:r>
-          </a:p>
-          <a:p>
-            <a:pPr>
-              <a:lnSpc>
-                <a:spcPct val="150000"/>
-              </a:lnSpc>
-            </a:pPr>
-            <a:r>
-              <a:rPr lang="en-US" altLang="zh-CN" sz="1100" dirty="0"/>
-              <a:t>LLM </a:t>
-            </a:r>
-            <a:r>
-              <a:rPr lang="zh-CN" altLang="en-US" sz="1100" dirty="0"/>
-              <a:t>执行查询 </a:t>
-            </a:r>
-            <a:r>
-              <a:rPr lang="en-US" altLang="zh-CN" sz="1100" dirty="0"/>
-              <a:t>-&gt; </a:t>
-            </a:r>
-            <a:r>
-              <a:rPr lang="zh-CN" altLang="en-US" sz="1100" dirty="0"/>
-              <a:t>拿到原始数据 </a:t>
-            </a:r>
-            <a:r>
-              <a:rPr lang="en-US" altLang="zh-CN" sz="1100" dirty="0"/>
-              <a:t>-&gt; </a:t>
-            </a:r>
-            <a:r>
-              <a:rPr lang="zh-CN" altLang="en-US" sz="1100" dirty="0"/>
-              <a:t>问本体这数字什么意思</a:t>
-            </a:r>
-          </a:p>
-          <a:p>
-            <a:pPr>
-              <a:lnSpc>
-                <a:spcPct val="150000"/>
-              </a:lnSpc>
-            </a:pPr>
-            <a:r>
-              <a:rPr lang="en-US" altLang="zh-CN" sz="1100" b="1" dirty="0"/>
-              <a:t>Phase 4: </a:t>
-            </a:r>
-            <a:r>
-              <a:rPr lang="zh-CN" altLang="en-US" sz="1100" b="1" dirty="0"/>
-              <a:t>综合推理</a:t>
-            </a:r>
-          </a:p>
-          <a:p>
-            <a:pPr>
-              <a:lnSpc>
-                <a:spcPct val="150000"/>
-              </a:lnSpc>
-            </a:pPr>
-            <a:r>
-              <a:rPr lang="en-US" altLang="zh-CN" sz="1100" dirty="0"/>
-              <a:t>LLM </a:t>
-            </a:r>
-            <a:r>
-              <a:rPr lang="zh-CN" altLang="en-US" sz="1100" dirty="0"/>
-              <a:t>提交事实 </a:t>
-            </a:r>
-            <a:r>
-              <a:rPr lang="en-US" altLang="zh-CN" sz="1100" dirty="0"/>
-              <a:t>-&gt; </a:t>
-            </a:r>
-            <a:r>
-              <a:rPr lang="zh-CN" altLang="en-US" sz="1100" dirty="0"/>
-              <a:t>本体规则引擎计算 </a:t>
-            </a:r>
-            <a:r>
-              <a:rPr lang="en-US" altLang="zh-CN" sz="1100" dirty="0"/>
-              <a:t>-&gt; LLM </a:t>
-            </a:r>
-            <a:r>
-              <a:rPr lang="zh-CN" altLang="en-US" sz="1100" dirty="0"/>
-              <a:t>解释结论</a:t>
-            </a:r>
-          </a:p>
-          <a:p>
-            <a:pPr>
-              <a:lnSpc>
-                <a:spcPct val="150000"/>
-              </a:lnSpc>
-            </a:pPr>
-            <a:r>
-              <a:rPr lang="en-US" altLang="zh-CN" sz="1100" b="1" dirty="0"/>
-              <a:t>Phase 5: </a:t>
-            </a:r>
-            <a:r>
-              <a:rPr lang="zh-CN" altLang="en-US" sz="1100" b="1" dirty="0"/>
-              <a:t>结果沉淀</a:t>
-            </a:r>
-          </a:p>
-          <a:p>
-            <a:pPr>
-              <a:lnSpc>
-                <a:spcPct val="150000"/>
-              </a:lnSpc>
-            </a:pPr>
-            <a:r>
-              <a:rPr lang="en-US" altLang="zh-CN" sz="1100" dirty="0"/>
-              <a:t>LLM </a:t>
-            </a:r>
-            <a:r>
-              <a:rPr lang="zh-CN" altLang="en-US" sz="1100" dirty="0"/>
-              <a:t>总结案例 </a:t>
-            </a:r>
-            <a:r>
-              <a:rPr lang="en-US" altLang="zh-CN" sz="1100" dirty="0"/>
-              <a:t>-&gt; </a:t>
-            </a:r>
-            <a:r>
-              <a:rPr lang="zh-CN" altLang="en-US" sz="1100" dirty="0"/>
-              <a:t>本体存储并发现规则盲区</a:t>
-            </a:r>
           </a:p>
         </p:txBody>
       </p:sp>
@@ -51420,6 +51354,31 @@
           <a:bodyPr rtlCol="0" anchor="ctr"/>
           <a:lstStyle/>
           <a:p>
+            <a:pPr algn="ctr">
+              <a:defRPr/>
+            </a:pPr>
+            <a:r>
+              <a:rPr kumimoji="1" lang="zh-CN" altLang="en-US" sz="1000" kern="0" dirty="0">
+                <a:solidFill>
+                  <a:srgbClr val="4472C4"/>
+                </a:solidFill>
+                <a:latin typeface="Microsoft YaHei" panose="020B0503020204020204" pitchFamily="34" charset="-122"/>
+                <a:ea typeface="Microsoft YaHei" panose="020B0503020204020204" pitchFamily="34" charset="-122"/>
+              </a:rPr>
+              <a:t>调用本地</a:t>
+            </a:r>
+            <a:r>
+              <a:rPr kumimoji="1" lang="en-US" altLang="zh-CN" sz="1000" kern="0" dirty="0">
+                <a:solidFill>
+                  <a:srgbClr val="4472C4"/>
+                </a:solidFill>
+                <a:latin typeface="Microsoft YaHei" panose="020B0503020204020204" pitchFamily="34" charset="-122"/>
+                <a:ea typeface="Microsoft YaHei" panose="020B0503020204020204" pitchFamily="34" charset="-122"/>
+              </a:rPr>
+              <a:t>MCP</a:t>
+            </a:r>
+          </a:p>
+          <a:p>
             <a:pPr marL="0" marR="0" lvl="0" indent="0" algn="ctr" defTabSz="914400" eaLnBrk="1" fontAlgn="auto" latinLnBrk="0" hangingPunct="1">
               <a:lnSpc>
                 <a:spcPct val="100000"/>
@@ -51480,8 +51439,8 @@
         </p:nvSpPr>
         <p:spPr>
           <a:xfrm>
-            <a:off x="3247704" y="4081087"/>
-            <a:ext cx="1461027" cy="256652"/>
+            <a:off x="3247704" y="3938447"/>
+            <a:ext cx="1461027" cy="216000"/>
           </a:xfrm>
           <a:prstGeom prst="roundRect">
             <a:avLst/>
@@ -51523,7 +51482,7 @@
               <a:defRPr/>
             </a:pPr>
             <a:r>
-              <a:rPr kumimoji="0" lang="zh-CN" altLang="en-US" sz="1400" b="0" i="0" u="none" strike="noStrike" kern="0" cap="none" spc="0" normalizeH="0" baseline="0" noProof="0" dirty="0">
+              <a:rPr kumimoji="0" lang="zh-CN" altLang="en-US" sz="1100" b="0" i="0" u="none" strike="noStrike" kern="0" cap="none" spc="0" normalizeH="0" baseline="0" noProof="0" dirty="0">
                 <a:ln>
                   <a:noFill/>
                 </a:ln>
@@ -51556,8 +51515,8 @@
         </p:nvSpPr>
         <p:spPr>
           <a:xfrm>
-            <a:off x="3247704" y="4427990"/>
-            <a:ext cx="1461027" cy="256652"/>
+            <a:off x="3247704" y="4238836"/>
+            <a:ext cx="1461027" cy="216000"/>
           </a:xfrm>
           <a:prstGeom prst="roundRect">
             <a:avLst/>
@@ -51599,7 +51558,7 @@
               <a:defRPr/>
             </a:pPr>
             <a:r>
-              <a:rPr kumimoji="0" lang="zh-CN" altLang="en-US" sz="1400" b="0" i="0" u="none" strike="noStrike" kern="0" cap="none" spc="0" normalizeH="0" baseline="0" noProof="0" dirty="0">
+              <a:rPr kumimoji="0" lang="zh-CN" altLang="en-US" sz="1100" b="0" i="0" u="none" strike="noStrike" kern="0" cap="none" spc="0" normalizeH="0" baseline="0" noProof="0" dirty="0">
                 <a:ln>
                   <a:noFill/>
                 </a:ln>
@@ -51632,8 +51591,8 @@
         </p:nvSpPr>
         <p:spPr>
           <a:xfrm>
-            <a:off x="3247704" y="4774893"/>
-            <a:ext cx="1461027" cy="256652"/>
+            <a:off x="3247704" y="4539225"/>
+            <a:ext cx="1461027" cy="216000"/>
           </a:xfrm>
           <a:prstGeom prst="roundRect">
             <a:avLst/>
@@ -51675,7 +51634,7 @@
               <a:defRPr/>
             </a:pPr>
             <a:r>
-              <a:rPr kumimoji="0" lang="zh-CN" altLang="en-US" sz="1400" b="0" i="0" u="none" strike="noStrike" kern="0" cap="none" spc="0" normalizeH="0" baseline="0" noProof="0" dirty="0">
+              <a:rPr kumimoji="0" lang="zh-CN" altLang="en-US" sz="1100" b="0" i="0" u="none" strike="noStrike" kern="0" cap="none" spc="0" normalizeH="0" baseline="0" noProof="0" dirty="0">
                 <a:ln>
                   <a:noFill/>
                 </a:ln>
@@ -51713,7 +51672,7 @@
         <p:spPr>
           <a:xfrm>
             <a:off x="2641925" y="4011758"/>
-            <a:ext cx="605779" cy="197655"/>
+            <a:ext cx="605779" cy="34689"/>
           </a:xfrm>
           <a:prstGeom prst="bentConnector3">
             <a:avLst/>
@@ -51749,7 +51708,7 @@
         <p:spPr>
           <a:xfrm>
             <a:off x="2641925" y="4011758"/>
-            <a:ext cx="605779" cy="891461"/>
+            <a:ext cx="605779" cy="635467"/>
           </a:xfrm>
           <a:prstGeom prst="bentConnector3">
             <a:avLst/>
@@ -51816,7 +51775,7 @@
         <p:spPr>
           <a:xfrm>
             <a:off x="3247704" y="3638058"/>
-            <a:ext cx="1461027" cy="351559"/>
+            <a:ext cx="1461027" cy="216000"/>
           </a:xfrm>
           <a:prstGeom prst="roundRect">
             <a:avLst/>
@@ -51858,7 +51817,7 @@
               <a:defRPr/>
             </a:pPr>
             <a:r>
-              <a:rPr kumimoji="0" lang="en-US" altLang="zh-CN" sz="1100" b="0" i="0" u="none" strike="noStrike" kern="0" cap="none" spc="0" normalizeH="0" baseline="0" noProof="0" dirty="0">
+              <a:rPr kumimoji="0" lang="zh-CN" altLang="en-US" sz="1100" b="0" i="0" u="none" strike="noStrike" kern="0" cap="none" spc="0" normalizeH="0" baseline="0" noProof="0" dirty="0">
                 <a:ln>
                   <a:noFill/>
                 </a:ln>
@@ -51872,8 +51831,22 @@
                 <a:ea typeface="华文楷体"/>
                 <a:cs typeface="+mn-cs"/>
               </a:rPr>
-              <a:t>Rule</a:t>
-            </a:r>
+              <a:t>权限检查</a:t>
+            </a:r>
+            <a:endParaRPr kumimoji="0" lang="en-US" altLang="zh-CN" sz="1100" b="0" i="0" u="none" strike="noStrike" kern="0" cap="none" spc="0" normalizeH="0" baseline="0" noProof="0" dirty="0">
+              <a:ln>
+                <a:noFill/>
+              </a:ln>
+              <a:solidFill>
+                <a:srgbClr val="000000"/>
+              </a:solidFill>
+              <a:effectLst/>
+              <a:uLnTx/>
+              <a:uFillTx/>
+              <a:latin typeface="华文楷体"/>
+              <a:ea typeface="华文楷体"/>
+              <a:cs typeface="+mn-cs"/>
+            </a:endParaRPr>
           </a:p>
         </p:txBody>
       </p:sp>
@@ -52129,7 +52102,7 @@
         <p:spPr>
           <a:xfrm>
             <a:off x="2641925" y="4011758"/>
-            <a:ext cx="605779" cy="544558"/>
+            <a:ext cx="605779" cy="335078"/>
           </a:xfrm>
           <a:prstGeom prst="bentConnector3">
             <a:avLst>
@@ -52166,8 +52139,8 @@
         </p:nvCxnSpPr>
         <p:spPr>
           <a:xfrm flipV="1">
-            <a:off x="2641925" y="3813838"/>
-            <a:ext cx="605779" cy="197920"/>
+            <a:off x="2641925" y="3746058"/>
+            <a:ext cx="605779" cy="265700"/>
           </a:xfrm>
           <a:prstGeom prst="bentConnector3">
             <a:avLst>
